--- a/ゲーム科1年/00_前期/ゲームプログラミングⅢ/ゲーム数学/実習/09_ベクトルの内積による前後判定.pptx
+++ b/ゲーム科1年/00_前期/ゲームプログラミングⅢ/ゲーム数学/実習/09_ベクトルの内積による前後判定.pptx
@@ -5,9 +5,13 @@
     <p:sldMasterId id="2147483648" r:id="rId1"/>
   </p:sldMasterIdLst>
   <p:sldIdLst>
-    <p:sldId id="256" r:id="rId2"/>
-    <p:sldId id="258" r:id="rId3"/>
-    <p:sldId id="257" r:id="rId4"/>
+    <p:sldId id="259" r:id="rId2"/>
+    <p:sldId id="260" r:id="rId3"/>
+    <p:sldId id="261" r:id="rId4"/>
+    <p:sldId id="262" r:id="rId5"/>
+    <p:sldId id="263" r:id="rId6"/>
+    <p:sldId id="264" r:id="rId7"/>
+    <p:sldId id="265" r:id="rId8"/>
   </p:sldIdLst>
   <p:sldSz cx="12192000" cy="6858000"/>
   <p:notesSz cx="6858000" cy="9144000"/>
@@ -261,7 +265,7 @@
           <a:p>
             <a:fld id="{E9CC885B-4903-4D54-9A93-00025F12DED9}" type="datetimeFigureOut">
               <a:rPr kumimoji="1" lang="ja-JP" altLang="en-US" smtClean="0"/>
-              <a:t>2024/8/27</a:t>
+              <a:t>2025/1/6</a:t>
             </a:fld>
             <a:endParaRPr kumimoji="1" lang="ja-JP" altLang="en-US"/>
           </a:p>
@@ -491,7 +495,7 @@
           <a:p>
             <a:fld id="{E9CC885B-4903-4D54-9A93-00025F12DED9}" type="datetimeFigureOut">
               <a:rPr kumimoji="1" lang="ja-JP" altLang="en-US" smtClean="0"/>
-              <a:t>2024/8/27</a:t>
+              <a:t>2025/1/6</a:t>
             </a:fld>
             <a:endParaRPr kumimoji="1" lang="ja-JP" altLang="en-US"/>
           </a:p>
@@ -731,7 +735,7 @@
           <a:p>
             <a:fld id="{E9CC885B-4903-4D54-9A93-00025F12DED9}" type="datetimeFigureOut">
               <a:rPr kumimoji="1" lang="ja-JP" altLang="en-US" smtClean="0"/>
-              <a:t>2024/8/27</a:t>
+              <a:t>2025/1/6</a:t>
             </a:fld>
             <a:endParaRPr kumimoji="1" lang="ja-JP" altLang="en-US"/>
           </a:p>
@@ -961,7 +965,7 @@
           <a:p>
             <a:fld id="{E9CC885B-4903-4D54-9A93-00025F12DED9}" type="datetimeFigureOut">
               <a:rPr kumimoji="1" lang="ja-JP" altLang="en-US" smtClean="0"/>
-              <a:t>2024/8/27</a:t>
+              <a:t>2025/1/6</a:t>
             </a:fld>
             <a:endParaRPr kumimoji="1" lang="ja-JP" altLang="en-US"/>
           </a:p>
@@ -1236,7 +1240,7 @@
           <a:p>
             <a:fld id="{E9CC885B-4903-4D54-9A93-00025F12DED9}" type="datetimeFigureOut">
               <a:rPr kumimoji="1" lang="ja-JP" altLang="en-US" smtClean="0"/>
-              <a:t>2024/8/27</a:t>
+              <a:t>2025/1/6</a:t>
             </a:fld>
             <a:endParaRPr kumimoji="1" lang="ja-JP" altLang="en-US"/>
           </a:p>
@@ -1565,7 +1569,7 @@
           <a:p>
             <a:fld id="{E9CC885B-4903-4D54-9A93-00025F12DED9}" type="datetimeFigureOut">
               <a:rPr kumimoji="1" lang="ja-JP" altLang="en-US" smtClean="0"/>
-              <a:t>2024/8/27</a:t>
+              <a:t>2025/1/6</a:t>
             </a:fld>
             <a:endParaRPr kumimoji="1" lang="ja-JP" altLang="en-US"/>
           </a:p>
@@ -2041,7 +2045,7 @@
           <a:p>
             <a:fld id="{E9CC885B-4903-4D54-9A93-00025F12DED9}" type="datetimeFigureOut">
               <a:rPr kumimoji="1" lang="ja-JP" altLang="en-US" smtClean="0"/>
-              <a:t>2024/8/27</a:t>
+              <a:t>2025/1/6</a:t>
             </a:fld>
             <a:endParaRPr kumimoji="1" lang="ja-JP" altLang="en-US"/>
           </a:p>
@@ -2182,7 +2186,7 @@
           <a:p>
             <a:fld id="{E9CC885B-4903-4D54-9A93-00025F12DED9}" type="datetimeFigureOut">
               <a:rPr kumimoji="1" lang="ja-JP" altLang="en-US" smtClean="0"/>
-              <a:t>2024/8/27</a:t>
+              <a:t>2025/1/6</a:t>
             </a:fld>
             <a:endParaRPr kumimoji="1" lang="ja-JP" altLang="en-US"/>
           </a:p>
@@ -2295,7 +2299,7 @@
           <a:p>
             <a:fld id="{E9CC885B-4903-4D54-9A93-00025F12DED9}" type="datetimeFigureOut">
               <a:rPr kumimoji="1" lang="ja-JP" altLang="en-US" smtClean="0"/>
-              <a:t>2024/8/27</a:t>
+              <a:t>2025/1/6</a:t>
             </a:fld>
             <a:endParaRPr kumimoji="1" lang="ja-JP" altLang="en-US"/>
           </a:p>
@@ -2638,7 +2642,7 @@
           <a:p>
             <a:fld id="{E9CC885B-4903-4D54-9A93-00025F12DED9}" type="datetimeFigureOut">
               <a:rPr kumimoji="1" lang="ja-JP" altLang="en-US" smtClean="0"/>
-              <a:t>2024/8/27</a:t>
+              <a:t>2025/1/6</a:t>
             </a:fld>
             <a:endParaRPr kumimoji="1" lang="ja-JP" altLang="en-US"/>
           </a:p>
@@ -2926,7 +2930,7 @@
           <a:p>
             <a:fld id="{E9CC885B-4903-4D54-9A93-00025F12DED9}" type="datetimeFigureOut">
               <a:rPr kumimoji="1" lang="ja-JP" altLang="en-US" smtClean="0"/>
-              <a:t>2024/8/27</a:t>
+              <a:t>2025/1/6</a:t>
             </a:fld>
             <a:endParaRPr kumimoji="1" lang="ja-JP" altLang="en-US"/>
           </a:p>
@@ -3199,7 +3203,7 @@
           <a:p>
             <a:fld id="{E9CC885B-4903-4D54-9A93-00025F12DED9}" type="datetimeFigureOut">
               <a:rPr kumimoji="1" lang="ja-JP" altLang="en-US" smtClean="0"/>
-              <a:t>2024/8/27</a:t>
+              <a:t>2025/1/6</a:t>
             </a:fld>
             <a:endParaRPr kumimoji="1" lang="ja-JP" altLang="en-US"/>
           </a:p>
@@ -3631,7 +3635,7 @@
         <p:spPr>
           <a:xfrm>
             <a:off x="567542" y="491954"/>
-            <a:ext cx="2504212" cy="584775"/>
+            <a:ext cx="5929828" cy="584775"/>
           </a:xfrm>
           <a:prstGeom prst="rect">
             <a:avLst/>
@@ -3645,12 +3649,8 @@
           <a:lstStyle/>
           <a:p>
             <a:r>
-              <a:rPr kumimoji="1" lang="en-US" altLang="ja-JP" sz="3200" b="1" u="sng" dirty="0"/>
-              <a:t>DirectX</a:t>
-            </a:r>
-            <a:r>
               <a:rPr kumimoji="1" lang="ja-JP" altLang="en-US" sz="3200" b="1" u="sng" dirty="0"/>
-              <a:t>とは</a:t>
+              <a:t>ベクトルの内積による前後判定</a:t>
             </a:r>
           </a:p>
         </p:txBody>
@@ -3670,7 +3670,7 @@
         <p:spPr>
           <a:xfrm>
             <a:off x="567542" y="1216429"/>
-            <a:ext cx="10033516" cy="3785652"/>
+            <a:ext cx="9725739" cy="830997"/>
           </a:xfrm>
           <a:prstGeom prst="rect">
             <a:avLst/>
@@ -3684,18 +3684,18 @@
           <a:lstStyle/>
           <a:p>
             <a:r>
-              <a:rPr kumimoji="1" lang="en-US" altLang="ja-JP" sz="2400" b="1" dirty="0">
+              <a:rPr lang="ja-JP" altLang="en-US" sz="2400" b="1" dirty="0">
                 <a:solidFill>
                   <a:srgbClr val="FF0000"/>
                 </a:solidFill>
               </a:rPr>
-              <a:t>DirectX</a:t>
-            </a:r>
-            <a:r>
-              <a:rPr kumimoji="1" lang="ja-JP" altLang="en-US" sz="2400" dirty="0"/>
-              <a:t>とはゲーム制作には欠かせない、</a:t>
-            </a:r>
-            <a:endParaRPr kumimoji="1" lang="en-US" altLang="ja-JP" sz="2400" dirty="0"/>
+              <a:t>プレイヤーがエネミーの前側にいるか後ろ側にいるか</a:t>
+            </a:r>
+            <a:r>
+              <a:rPr lang="ja-JP" altLang="en-US" sz="2400" dirty="0"/>
+              <a:t>判定します。</a:t>
+            </a:r>
+            <a:endParaRPr lang="en-US" altLang="ja-JP" sz="2400" dirty="0"/>
           </a:p>
           <a:p>
             <a:r>
@@ -3704,108 +3704,245 @@
                   <a:srgbClr val="FF0000"/>
                 </a:solidFill>
               </a:rPr>
-              <a:t>画像、音声、コントローラー入力などをサポートしたライブラリ</a:t>
+              <a:t>ベクトルの内積</a:t>
             </a:r>
             <a:r>
               <a:rPr kumimoji="1" lang="ja-JP" altLang="en-US" sz="2400" dirty="0"/>
-              <a:t>です。</a:t>
+              <a:t>を計算すると判定することができます。</a:t>
             </a:r>
             <a:endParaRPr kumimoji="1" lang="en-US" altLang="ja-JP" sz="2400" dirty="0"/>
           </a:p>
-          <a:p>
-            <a:endParaRPr lang="en-US" altLang="ja-JP" sz="2400" dirty="0"/>
-          </a:p>
-          <a:p>
-            <a:r>
-              <a:rPr kumimoji="1" lang="en-US" altLang="ja-JP" sz="2400" dirty="0"/>
-              <a:t>1995</a:t>
-            </a:r>
-            <a:r>
-              <a:rPr kumimoji="1" lang="ja-JP" altLang="en-US" sz="2400" dirty="0"/>
-              <a:t>年に</a:t>
-            </a:r>
-            <a:r>
-              <a:rPr kumimoji="1" lang="en-US" altLang="ja-JP" sz="2400" dirty="0"/>
-              <a:t>Micro Soft</a:t>
-            </a:r>
-            <a:r>
-              <a:rPr kumimoji="1" lang="ja-JP" altLang="en-US" sz="2400" dirty="0"/>
-              <a:t>が公開したもので、</a:t>
-            </a:r>
-            <a:endParaRPr kumimoji="1" lang="en-US" altLang="ja-JP" sz="2400" dirty="0"/>
-          </a:p>
-          <a:p>
-            <a:r>
-              <a:rPr lang="en-US" altLang="ja-JP" sz="2400" dirty="0"/>
-              <a:t>PC</a:t>
-            </a:r>
-            <a:r>
-              <a:rPr lang="ja-JP" altLang="en-US" sz="2400" dirty="0"/>
-              <a:t>ゲームを制作するには欠かせないものでした。</a:t>
-            </a:r>
-            <a:endParaRPr lang="en-US" altLang="ja-JP" sz="2400" dirty="0"/>
-          </a:p>
-          <a:p>
-            <a:endParaRPr kumimoji="1" lang="en-US" altLang="ja-JP" sz="2400" dirty="0"/>
-          </a:p>
-          <a:p>
-            <a:r>
-              <a:rPr lang="ja-JP" altLang="en-US" sz="2400" dirty="0"/>
-              <a:t>公開後から技術の進歩に連れてバージョンアップされており、</a:t>
-            </a:r>
-            <a:endParaRPr lang="en-US" altLang="ja-JP" sz="2400" dirty="0"/>
-          </a:p>
-          <a:p>
-            <a:r>
-              <a:rPr kumimoji="1" lang="ja-JP" altLang="en-US" sz="2400" dirty="0"/>
-              <a:t>最新版は</a:t>
-            </a:r>
-            <a:r>
-              <a:rPr kumimoji="1" lang="en-US" altLang="ja-JP" sz="2400" dirty="0"/>
-              <a:t>2015</a:t>
-            </a:r>
-            <a:r>
-              <a:rPr kumimoji="1" lang="ja-JP" altLang="en-US" sz="2400" dirty="0"/>
-              <a:t>年に公開された</a:t>
-            </a:r>
-            <a:r>
-              <a:rPr kumimoji="1" lang="en-US" altLang="ja-JP" sz="2400" dirty="0"/>
-              <a:t>DirectX12</a:t>
-            </a:r>
-            <a:r>
-              <a:rPr kumimoji="1" lang="ja-JP" altLang="en-US" sz="2400" dirty="0"/>
-              <a:t>になります。</a:t>
-            </a:r>
-            <a:endParaRPr kumimoji="1" lang="en-US" altLang="ja-JP" sz="2400" dirty="0"/>
-          </a:p>
-          <a:p>
-            <a:endParaRPr lang="en-US" altLang="ja-JP" sz="2400" dirty="0"/>
-          </a:p>
-          <a:p>
-            <a:r>
-              <a:rPr kumimoji="1" lang="en-US" altLang="ja-JP" sz="2400" dirty="0"/>
-              <a:t>※2020</a:t>
-            </a:r>
-            <a:r>
-              <a:rPr kumimoji="1" lang="ja-JP" altLang="en-US" sz="2400" dirty="0"/>
-              <a:t>年に</a:t>
-            </a:r>
-            <a:r>
-              <a:rPr kumimoji="1" lang="en-US" altLang="ja-JP" sz="2400" dirty="0"/>
-              <a:t>DirectX12 Ultimate</a:t>
-            </a:r>
-            <a:r>
-              <a:rPr kumimoji="1" lang="ja-JP" altLang="en-US" sz="2400" dirty="0"/>
-              <a:t>なるものが一応公開されている</a:t>
-            </a:r>
-            <a:endParaRPr kumimoji="1" lang="en-US" altLang="ja-JP" sz="2400" dirty="0"/>
-          </a:p>
-        </p:txBody>
-      </p:sp>
+        </p:txBody>
+      </p:sp>
+      <p:grpSp>
+        <p:nvGrpSpPr>
+          <p:cNvPr id="12" name="グループ化 11">
+            <a:extLst>
+              <a:ext uri="{FF2B5EF4-FFF2-40B4-BE49-F238E27FC236}">
+                <a16:creationId xmlns:a16="http://schemas.microsoft.com/office/drawing/2014/main" id="{A83CC8DD-10F9-48C7-A523-40272662B7C6}"/>
+              </a:ext>
+            </a:extLst>
+          </p:cNvPr>
+          <p:cNvGrpSpPr/>
+          <p:nvPr/>
+        </p:nvGrpSpPr>
+        <p:grpSpPr>
+          <a:xfrm>
+            <a:off x="567542" y="2187126"/>
+            <a:ext cx="6563042" cy="3476239"/>
+            <a:chOff x="-567955" y="3002587"/>
+            <a:chExt cx="6563042" cy="3476239"/>
+          </a:xfrm>
+        </p:grpSpPr>
+        <p:pic>
+          <p:nvPicPr>
+            <p:cNvPr id="3" name="図 2">
+              <a:extLst>
+                <a:ext uri="{FF2B5EF4-FFF2-40B4-BE49-F238E27FC236}">
+                  <a16:creationId xmlns:a16="http://schemas.microsoft.com/office/drawing/2014/main" id="{2EB99CF9-0BEE-409C-906E-9AB2724D533E}"/>
+                </a:ext>
+              </a:extLst>
+            </p:cNvPr>
+            <p:cNvPicPr>
+              <a:picLocks noChangeAspect="1"/>
+            </p:cNvPicPr>
+            <p:nvPr/>
+          </p:nvPicPr>
+          <p:blipFill>
+            <a:blip r:embed="rId2">
+              <a:extLst>
+                <a:ext uri="{28A0092B-C50C-407E-A947-70E740481C1C}">
+                  <a14:useLocalDpi xmlns:a14="http://schemas.microsoft.com/office/drawing/2010/main" val="0"/>
+                </a:ext>
+              </a:extLst>
+            </a:blip>
+            <a:stretch>
+              <a:fillRect/>
+            </a:stretch>
+          </p:blipFill>
+          <p:spPr>
+            <a:xfrm>
+              <a:off x="2233937" y="4089643"/>
+              <a:ext cx="720931" cy="720931"/>
+            </a:xfrm>
+            <a:prstGeom prst="rect">
+              <a:avLst/>
+            </a:prstGeom>
+          </p:spPr>
+        </p:pic>
+        <p:pic>
+          <p:nvPicPr>
+            <p:cNvPr id="7" name="図 6">
+              <a:extLst>
+                <a:ext uri="{FF2B5EF4-FFF2-40B4-BE49-F238E27FC236}">
+                  <a16:creationId xmlns:a16="http://schemas.microsoft.com/office/drawing/2014/main" id="{94087D2A-7CDD-473F-8975-7F2823CD03EA}"/>
+                </a:ext>
+              </a:extLst>
+            </p:cNvPr>
+            <p:cNvPicPr>
+              <a:picLocks noChangeAspect="1"/>
+            </p:cNvPicPr>
+            <p:nvPr/>
+          </p:nvPicPr>
+          <p:blipFill>
+            <a:blip r:embed="rId3">
+              <a:extLst>
+                <a:ext uri="{28A0092B-C50C-407E-A947-70E740481C1C}">
+                  <a14:useLocalDpi xmlns:a14="http://schemas.microsoft.com/office/drawing/2010/main" val="0"/>
+                </a:ext>
+              </a:extLst>
+            </a:blip>
+            <a:stretch>
+              <a:fillRect/>
+            </a:stretch>
+          </p:blipFill>
+          <p:spPr>
+            <a:xfrm>
+              <a:off x="4757963" y="5390296"/>
+              <a:ext cx="544265" cy="1088530"/>
+            </a:xfrm>
+            <a:prstGeom prst="rect">
+              <a:avLst/>
+            </a:prstGeom>
+          </p:spPr>
+        </p:pic>
+        <p:cxnSp>
+          <p:nvCxnSpPr>
+            <p:cNvPr id="9" name="直線コネクタ 8">
+              <a:extLst>
+                <a:ext uri="{FF2B5EF4-FFF2-40B4-BE49-F238E27FC236}">
+                  <a16:creationId xmlns:a16="http://schemas.microsoft.com/office/drawing/2014/main" id="{147FA9CB-033F-4408-BDC4-3E8D09600CA4}"/>
+                </a:ext>
+              </a:extLst>
+            </p:cNvPr>
+            <p:cNvCxnSpPr>
+              <a:cxnSpLocks/>
+            </p:cNvCxnSpPr>
+            <p:nvPr/>
+          </p:nvCxnSpPr>
+          <p:spPr>
+            <a:xfrm>
+              <a:off x="2594402" y="3002587"/>
+              <a:ext cx="0" cy="3310467"/>
+            </a:xfrm>
+            <a:prstGeom prst="line">
+              <a:avLst/>
+            </a:prstGeom>
+            <a:ln w="12700">
+              <a:solidFill>
+                <a:schemeClr val="tx1"/>
+              </a:solidFill>
+              <a:prstDash val="dash"/>
+            </a:ln>
+          </p:spPr>
+          <p:style>
+            <a:lnRef idx="1">
+              <a:schemeClr val="accent1"/>
+            </a:lnRef>
+            <a:fillRef idx="0">
+              <a:schemeClr val="accent1"/>
+            </a:fillRef>
+            <a:effectRef idx="0">
+              <a:schemeClr val="accent1"/>
+            </a:effectRef>
+            <a:fontRef idx="minor">
+              <a:schemeClr val="tx1"/>
+            </a:fontRef>
+          </p:style>
+        </p:cxnSp>
+        <p:sp>
+          <p:nvSpPr>
+            <p:cNvPr id="10" name="テキスト ボックス 9">
+              <a:extLst>
+                <a:ext uri="{FF2B5EF4-FFF2-40B4-BE49-F238E27FC236}">
+                  <a16:creationId xmlns:a16="http://schemas.microsoft.com/office/drawing/2014/main" id="{60A4658E-1514-4FF5-8C20-EF8662A8DD92}"/>
+                </a:ext>
+              </a:extLst>
+            </p:cNvPr>
+            <p:cNvSpPr txBox="1"/>
+            <p:nvPr/>
+          </p:nvSpPr>
+          <p:spPr>
+            <a:xfrm>
+              <a:off x="5502644" y="4219275"/>
+              <a:ext cx="492443" cy="461665"/>
+            </a:xfrm>
+            <a:prstGeom prst="rect">
+              <a:avLst/>
+            </a:prstGeom>
+            <a:noFill/>
+          </p:spPr>
+          <p:txBody>
+            <a:bodyPr wrap="none" rtlCol="0">
+              <a:spAutoFit/>
+            </a:bodyPr>
+            <a:lstStyle/>
+            <a:p>
+              <a:r>
+                <a:rPr kumimoji="1" lang="ja-JP" altLang="en-US" sz="2400" b="1" dirty="0">
+                  <a:solidFill>
+                    <a:srgbClr val="FF0000"/>
+                  </a:solidFill>
+                </a:rPr>
+                <a:t>前</a:t>
+              </a:r>
+              <a:endParaRPr kumimoji="1" lang="en-US" altLang="ja-JP" sz="2400" b="1" dirty="0">
+                <a:solidFill>
+                  <a:srgbClr val="FF0000"/>
+                </a:solidFill>
+              </a:endParaRPr>
+            </a:p>
+          </p:txBody>
+        </p:sp>
+        <p:sp>
+          <p:nvSpPr>
+            <p:cNvPr id="11" name="テキスト ボックス 10">
+              <a:extLst>
+                <a:ext uri="{FF2B5EF4-FFF2-40B4-BE49-F238E27FC236}">
+                  <a16:creationId xmlns:a16="http://schemas.microsoft.com/office/drawing/2014/main" id="{34809C44-C3A0-4205-A107-441302F1F2CF}"/>
+                </a:ext>
+              </a:extLst>
+            </p:cNvPr>
+            <p:cNvSpPr txBox="1"/>
+            <p:nvPr/>
+          </p:nvSpPr>
+          <p:spPr>
+            <a:xfrm>
+              <a:off x="-567955" y="4219274"/>
+              <a:ext cx="800219" cy="461665"/>
+            </a:xfrm>
+            <a:prstGeom prst="rect">
+              <a:avLst/>
+            </a:prstGeom>
+            <a:noFill/>
+          </p:spPr>
+          <p:txBody>
+            <a:bodyPr wrap="none" rtlCol="0">
+              <a:spAutoFit/>
+            </a:bodyPr>
+            <a:lstStyle/>
+            <a:p>
+              <a:r>
+                <a:rPr lang="ja-JP" altLang="en-US" sz="2400" b="1" dirty="0">
+                  <a:solidFill>
+                    <a:srgbClr val="FF0000"/>
+                  </a:solidFill>
+                </a:rPr>
+                <a:t>後ろ</a:t>
+              </a:r>
+              <a:endParaRPr kumimoji="1" lang="en-US" altLang="ja-JP" sz="2400" b="1" dirty="0">
+                <a:solidFill>
+                  <a:srgbClr val="FF0000"/>
+                </a:solidFill>
+              </a:endParaRPr>
+            </a:p>
+          </p:txBody>
+        </p:sp>
+      </p:grpSp>
     </p:spTree>
     <p:extLst>
       <p:ext uri="{BB962C8B-B14F-4D97-AF65-F5344CB8AC3E}">
-        <p14:creationId xmlns:p14="http://schemas.microsoft.com/office/powerpoint/2010/main" val="410028988"/>
+        <p14:creationId xmlns:p14="http://schemas.microsoft.com/office/powerpoint/2010/main" val="1051131077"/>
       </p:ext>
     </p:extLst>
   </p:cSld>
@@ -3847,7 +3984,7 @@
         <p:spPr>
           <a:xfrm>
             <a:off x="567542" y="491954"/>
-            <a:ext cx="2504212" cy="584775"/>
+            <a:ext cx="5929828" cy="584775"/>
           </a:xfrm>
           <a:prstGeom prst="rect">
             <a:avLst/>
@@ -3861,12 +3998,8 @@
           <a:lstStyle/>
           <a:p>
             <a:r>
-              <a:rPr kumimoji="1" lang="en-US" altLang="ja-JP" sz="3200" b="1" u="sng" dirty="0"/>
-              <a:t>DirectX</a:t>
-            </a:r>
-            <a:r>
               <a:rPr kumimoji="1" lang="ja-JP" altLang="en-US" sz="3200" b="1" u="sng" dirty="0"/>
-              <a:t>とは</a:t>
+              <a:t>ベクトルの内積による前後判定</a:t>
             </a:r>
           </a:p>
         </p:txBody>
@@ -3886,7 +4019,7 @@
         <p:spPr>
           <a:xfrm>
             <a:off x="567542" y="1216429"/>
-            <a:ext cx="9554219" cy="4524315"/>
+            <a:ext cx="8494633" cy="461665"/>
           </a:xfrm>
           <a:prstGeom prst="rect">
             <a:avLst/>
@@ -3900,114 +4033,317 @@
           <a:lstStyle/>
           <a:p>
             <a:r>
-              <a:rPr kumimoji="1" lang="en-US" altLang="ja-JP" sz="2400" dirty="0"/>
-              <a:t>PC</a:t>
-            </a:r>
-            <a:r>
-              <a:rPr kumimoji="1" lang="ja-JP" altLang="en-US" sz="2400" dirty="0"/>
-              <a:t>ゲームを制作するためには</a:t>
-            </a:r>
-            <a:r>
-              <a:rPr kumimoji="1" lang="en-US" altLang="ja-JP" sz="2400" dirty="0"/>
-              <a:t>DirectX</a:t>
-            </a:r>
-            <a:r>
-              <a:rPr kumimoji="1" lang="ja-JP" altLang="en-US" sz="2400" dirty="0"/>
-              <a:t>を使わなければいけません。</a:t>
+              <a:rPr lang="ja-JP" altLang="en-US" sz="2400" dirty="0"/>
+              <a:t>まず、</a:t>
+            </a:r>
+            <a:r>
+              <a:rPr lang="ja-JP" altLang="en-US" sz="2400" b="1" dirty="0">
+                <a:solidFill>
+                  <a:srgbClr val="FF0000"/>
+                </a:solidFill>
+              </a:rPr>
+              <a:t>エネミーからプレイヤーまでのベクトル</a:t>
+            </a:r>
+            <a:r>
+              <a:rPr lang="ja-JP" altLang="en-US" sz="2400" dirty="0"/>
+              <a:t>を作ります。</a:t>
             </a:r>
             <a:endParaRPr kumimoji="1" lang="en-US" altLang="ja-JP" sz="2400" dirty="0"/>
           </a:p>
-          <a:p>
-            <a:endParaRPr lang="en-US" altLang="ja-JP" sz="2400" dirty="0"/>
-          </a:p>
-          <a:p>
-            <a:r>
-              <a:rPr kumimoji="1" lang="ja-JP" altLang="en-US" sz="2400" dirty="0"/>
-              <a:t>ただし、</a:t>
-            </a:r>
-            <a:r>
-              <a:rPr kumimoji="1" lang="en-US" altLang="ja-JP" sz="2400" dirty="0"/>
-              <a:t>DirectX</a:t>
-            </a:r>
-            <a:r>
-              <a:rPr kumimoji="1" lang="ja-JP" altLang="en-US" sz="2400" dirty="0"/>
-              <a:t>はハードウェアにまつわるあらゆる機能の設定や、</a:t>
-            </a:r>
-            <a:endParaRPr lang="en-US" altLang="ja-JP" sz="2400" dirty="0"/>
-          </a:p>
-          <a:p>
-            <a:r>
-              <a:rPr kumimoji="1" lang="en-US" altLang="ja-JP" sz="2400" dirty="0"/>
-              <a:t>2D</a:t>
-            </a:r>
-            <a:r>
-              <a:rPr kumimoji="1" lang="ja-JP" altLang="en-US" sz="2400" dirty="0"/>
-              <a:t>、</a:t>
-            </a:r>
-            <a:r>
-              <a:rPr kumimoji="1" lang="en-US" altLang="ja-JP" sz="2400" dirty="0"/>
-              <a:t>3D</a:t>
-            </a:r>
-            <a:r>
-              <a:rPr kumimoji="1" lang="ja-JP" altLang="en-US" sz="2400" dirty="0"/>
-              <a:t>画像の読み込み、解析など、</a:t>
-            </a:r>
-            <a:endParaRPr kumimoji="1" lang="en-US" altLang="ja-JP" sz="2400" dirty="0"/>
-          </a:p>
-          <a:p>
-            <a:r>
-              <a:rPr lang="ja-JP" altLang="en-US" sz="2400" dirty="0"/>
-              <a:t>あらゆるものを、詳細に理解して使いこなさなければいけません。</a:t>
-            </a:r>
-            <a:endParaRPr lang="en-US" altLang="ja-JP" sz="2400" dirty="0"/>
-          </a:p>
-          <a:p>
-            <a:endParaRPr kumimoji="1" lang="en-US" altLang="ja-JP" sz="2400" dirty="0"/>
-          </a:p>
-          <a:p>
-            <a:r>
-              <a:rPr lang="ja-JP" altLang="en-US" sz="2400" dirty="0"/>
-              <a:t>そのため、</a:t>
-            </a:r>
-            <a:endParaRPr kumimoji="1" lang="en-US" altLang="ja-JP" sz="2400" dirty="0"/>
-          </a:p>
-          <a:p>
-            <a:r>
-              <a:rPr kumimoji="1" lang="ja-JP" altLang="en-US" sz="2400" dirty="0"/>
-              <a:t>１枚の画像を表示するだけでも非常に手間と時間がかかります。</a:t>
-            </a:r>
-            <a:endParaRPr kumimoji="1" lang="en-US" altLang="ja-JP" sz="2400" dirty="0"/>
-          </a:p>
-          <a:p>
-            <a:endParaRPr lang="en-US" altLang="ja-JP" sz="2400" dirty="0"/>
-          </a:p>
-          <a:p>
-            <a:r>
-              <a:rPr lang="ja-JP" altLang="en-US" sz="2400" dirty="0"/>
-              <a:t>■補足</a:t>
-            </a:r>
-            <a:endParaRPr lang="en-US" altLang="ja-JP" sz="2400" dirty="0"/>
-          </a:p>
-          <a:p>
-            <a:r>
-              <a:rPr kumimoji="1" lang="ja-JP" altLang="en-US" sz="2400" dirty="0"/>
-              <a:t>その分、自分好みのカスタマイズができるので、</a:t>
-            </a:r>
-            <a:endParaRPr kumimoji="1" lang="en-US" altLang="ja-JP" sz="2400" dirty="0"/>
-          </a:p>
-          <a:p>
-            <a:r>
-              <a:rPr lang="ja-JP" altLang="en-US" sz="2400" dirty="0"/>
-              <a:t>ゲームに合った動作環境を構築することはできます。</a:t>
-            </a:r>
-            <a:endParaRPr kumimoji="1" lang="en-US" altLang="ja-JP" sz="2400" dirty="0"/>
-          </a:p>
-        </p:txBody>
-      </p:sp>
+        </p:txBody>
+      </p:sp>
+      <p:grpSp>
+        <p:nvGrpSpPr>
+          <p:cNvPr id="5" name="グループ化 4">
+            <a:extLst>
+              <a:ext uri="{FF2B5EF4-FFF2-40B4-BE49-F238E27FC236}">
+                <a16:creationId xmlns:a16="http://schemas.microsoft.com/office/drawing/2014/main" id="{B76EA71F-970B-4678-B9C1-05E627C96CD3}"/>
+              </a:ext>
+            </a:extLst>
+          </p:cNvPr>
+          <p:cNvGrpSpPr/>
+          <p:nvPr/>
+        </p:nvGrpSpPr>
+        <p:grpSpPr>
+          <a:xfrm>
+            <a:off x="567542" y="2187126"/>
+            <a:ext cx="6563042" cy="3476239"/>
+            <a:chOff x="567542" y="2187126"/>
+            <a:chExt cx="6563042" cy="3476239"/>
+          </a:xfrm>
+        </p:grpSpPr>
+        <p:grpSp>
+          <p:nvGrpSpPr>
+            <p:cNvPr id="38" name="グループ化 37">
+              <a:extLst>
+                <a:ext uri="{FF2B5EF4-FFF2-40B4-BE49-F238E27FC236}">
+                  <a16:creationId xmlns:a16="http://schemas.microsoft.com/office/drawing/2014/main" id="{67BE8AC2-CDCC-4605-9E8C-86C98AFBCE83}"/>
+                </a:ext>
+              </a:extLst>
+            </p:cNvPr>
+            <p:cNvGrpSpPr/>
+            <p:nvPr/>
+          </p:nvGrpSpPr>
+          <p:grpSpPr>
+            <a:xfrm>
+              <a:off x="567542" y="2187126"/>
+              <a:ext cx="6563042" cy="3476239"/>
+              <a:chOff x="-567955" y="3002587"/>
+              <a:chExt cx="6563042" cy="3476239"/>
+            </a:xfrm>
+          </p:grpSpPr>
+          <p:pic>
+            <p:nvPicPr>
+              <p:cNvPr id="39" name="図 38">
+                <a:extLst>
+                  <a:ext uri="{FF2B5EF4-FFF2-40B4-BE49-F238E27FC236}">
+                    <a16:creationId xmlns:a16="http://schemas.microsoft.com/office/drawing/2014/main" id="{80433657-247B-4698-8B0F-AF085C1574A5}"/>
+                  </a:ext>
+                </a:extLst>
+              </p:cNvPr>
+              <p:cNvPicPr>
+                <a:picLocks noChangeAspect="1"/>
+              </p:cNvPicPr>
+              <p:nvPr/>
+            </p:nvPicPr>
+            <p:blipFill>
+              <a:blip r:embed="rId2">
+                <a:extLst>
+                  <a:ext uri="{28A0092B-C50C-407E-A947-70E740481C1C}">
+                    <a14:useLocalDpi xmlns:a14="http://schemas.microsoft.com/office/drawing/2010/main" val="0"/>
+                  </a:ext>
+                </a:extLst>
+              </a:blip>
+              <a:stretch>
+                <a:fillRect/>
+              </a:stretch>
+            </p:blipFill>
+            <p:spPr>
+              <a:xfrm>
+                <a:off x="2233937" y="4089643"/>
+                <a:ext cx="720931" cy="720931"/>
+              </a:xfrm>
+              <a:prstGeom prst="rect">
+                <a:avLst/>
+              </a:prstGeom>
+            </p:spPr>
+          </p:pic>
+          <p:pic>
+            <p:nvPicPr>
+              <p:cNvPr id="40" name="図 39">
+                <a:extLst>
+                  <a:ext uri="{FF2B5EF4-FFF2-40B4-BE49-F238E27FC236}">
+                    <a16:creationId xmlns:a16="http://schemas.microsoft.com/office/drawing/2014/main" id="{C42B52A7-9F44-4681-AA47-60D0B9E51C03}"/>
+                  </a:ext>
+                </a:extLst>
+              </p:cNvPr>
+              <p:cNvPicPr>
+                <a:picLocks noChangeAspect="1"/>
+              </p:cNvPicPr>
+              <p:nvPr/>
+            </p:nvPicPr>
+            <p:blipFill>
+              <a:blip r:embed="rId3">
+                <a:extLst>
+                  <a:ext uri="{28A0092B-C50C-407E-A947-70E740481C1C}">
+                    <a14:useLocalDpi xmlns:a14="http://schemas.microsoft.com/office/drawing/2010/main" val="0"/>
+                  </a:ext>
+                </a:extLst>
+              </a:blip>
+              <a:stretch>
+                <a:fillRect/>
+              </a:stretch>
+            </p:blipFill>
+            <p:spPr>
+              <a:xfrm>
+                <a:off x="4757963" y="5390296"/>
+                <a:ext cx="544265" cy="1088530"/>
+              </a:xfrm>
+              <a:prstGeom prst="rect">
+                <a:avLst/>
+              </a:prstGeom>
+            </p:spPr>
+          </p:pic>
+          <p:cxnSp>
+            <p:nvCxnSpPr>
+              <p:cNvPr id="41" name="直線コネクタ 40">
+                <a:extLst>
+                  <a:ext uri="{FF2B5EF4-FFF2-40B4-BE49-F238E27FC236}">
+                    <a16:creationId xmlns:a16="http://schemas.microsoft.com/office/drawing/2014/main" id="{CC0D77F7-C671-4C3B-8502-899040C0DE02}"/>
+                  </a:ext>
+                </a:extLst>
+              </p:cNvPr>
+              <p:cNvCxnSpPr>
+                <a:cxnSpLocks/>
+              </p:cNvCxnSpPr>
+              <p:nvPr/>
+            </p:nvCxnSpPr>
+            <p:spPr>
+              <a:xfrm>
+                <a:off x="2594402" y="3002587"/>
+                <a:ext cx="0" cy="3310467"/>
+              </a:xfrm>
+              <a:prstGeom prst="line">
+                <a:avLst/>
+              </a:prstGeom>
+              <a:ln w="12700">
+                <a:solidFill>
+                  <a:schemeClr val="tx1"/>
+                </a:solidFill>
+                <a:prstDash val="dash"/>
+              </a:ln>
+            </p:spPr>
+            <p:style>
+              <a:lnRef idx="1">
+                <a:schemeClr val="accent1"/>
+              </a:lnRef>
+              <a:fillRef idx="0">
+                <a:schemeClr val="accent1"/>
+              </a:fillRef>
+              <a:effectRef idx="0">
+                <a:schemeClr val="accent1"/>
+              </a:effectRef>
+              <a:fontRef idx="minor">
+                <a:schemeClr val="tx1"/>
+              </a:fontRef>
+            </p:style>
+          </p:cxnSp>
+          <p:sp>
+            <p:nvSpPr>
+              <p:cNvPr id="42" name="テキスト ボックス 41">
+                <a:extLst>
+                  <a:ext uri="{FF2B5EF4-FFF2-40B4-BE49-F238E27FC236}">
+                    <a16:creationId xmlns:a16="http://schemas.microsoft.com/office/drawing/2014/main" id="{EDED2561-C837-4176-A1E7-351D79EB879A}"/>
+                  </a:ext>
+                </a:extLst>
+              </p:cNvPr>
+              <p:cNvSpPr txBox="1"/>
+              <p:nvPr/>
+            </p:nvSpPr>
+            <p:spPr>
+              <a:xfrm>
+                <a:off x="5502644" y="4219275"/>
+                <a:ext cx="492443" cy="461665"/>
+              </a:xfrm>
+              <a:prstGeom prst="rect">
+                <a:avLst/>
+              </a:prstGeom>
+              <a:noFill/>
+            </p:spPr>
+            <p:txBody>
+              <a:bodyPr wrap="none" rtlCol="0">
+                <a:spAutoFit/>
+              </a:bodyPr>
+              <a:lstStyle/>
+              <a:p>
+                <a:r>
+                  <a:rPr kumimoji="1" lang="ja-JP" altLang="en-US" sz="2400" b="1" dirty="0">
+                    <a:solidFill>
+                      <a:srgbClr val="FF0000"/>
+                    </a:solidFill>
+                  </a:rPr>
+                  <a:t>前</a:t>
+                </a:r>
+                <a:endParaRPr kumimoji="1" lang="en-US" altLang="ja-JP" sz="2400" b="1" dirty="0">
+                  <a:solidFill>
+                    <a:srgbClr val="FF0000"/>
+                  </a:solidFill>
+                </a:endParaRPr>
+              </a:p>
+            </p:txBody>
+          </p:sp>
+          <p:sp>
+            <p:nvSpPr>
+              <p:cNvPr id="43" name="テキスト ボックス 42">
+                <a:extLst>
+                  <a:ext uri="{FF2B5EF4-FFF2-40B4-BE49-F238E27FC236}">
+                    <a16:creationId xmlns:a16="http://schemas.microsoft.com/office/drawing/2014/main" id="{31CE621E-2690-4194-B9C4-955A3A21B2AA}"/>
+                  </a:ext>
+                </a:extLst>
+              </p:cNvPr>
+              <p:cNvSpPr txBox="1"/>
+              <p:nvPr/>
+            </p:nvSpPr>
+            <p:spPr>
+              <a:xfrm>
+                <a:off x="-567955" y="4219274"/>
+                <a:ext cx="800219" cy="461665"/>
+              </a:xfrm>
+              <a:prstGeom prst="rect">
+                <a:avLst/>
+              </a:prstGeom>
+              <a:noFill/>
+            </p:spPr>
+            <p:txBody>
+              <a:bodyPr wrap="none" rtlCol="0">
+                <a:spAutoFit/>
+              </a:bodyPr>
+              <a:lstStyle/>
+              <a:p>
+                <a:r>
+                  <a:rPr lang="ja-JP" altLang="en-US" sz="2400" b="1" dirty="0">
+                    <a:solidFill>
+                      <a:srgbClr val="FF0000"/>
+                    </a:solidFill>
+                  </a:rPr>
+                  <a:t>後ろ</a:t>
+                </a:r>
+                <a:endParaRPr kumimoji="1" lang="en-US" altLang="ja-JP" sz="2400" b="1" dirty="0">
+                  <a:solidFill>
+                    <a:srgbClr val="FF0000"/>
+                  </a:solidFill>
+                </a:endParaRPr>
+              </a:p>
+            </p:txBody>
+          </p:sp>
+        </p:grpSp>
+        <p:cxnSp>
+          <p:nvCxnSpPr>
+            <p:cNvPr id="3" name="直線矢印コネクタ 2">
+              <a:extLst>
+                <a:ext uri="{FF2B5EF4-FFF2-40B4-BE49-F238E27FC236}">
+                  <a16:creationId xmlns:a16="http://schemas.microsoft.com/office/drawing/2014/main" id="{13221960-C0A7-4E5B-89AA-9C7D87357265}"/>
+                </a:ext>
+              </a:extLst>
+            </p:cNvPr>
+            <p:cNvCxnSpPr/>
+            <p:nvPr/>
+          </p:nvCxnSpPr>
+          <p:spPr>
+            <a:xfrm>
+              <a:off x="3733800" y="3615267"/>
+              <a:ext cx="2175933" cy="990600"/>
+            </a:xfrm>
+            <a:prstGeom prst="straightConnector1">
+              <a:avLst/>
+            </a:prstGeom>
+            <a:ln w="38100">
+              <a:solidFill>
+                <a:srgbClr val="FF0000"/>
+              </a:solidFill>
+              <a:tailEnd type="triangle"/>
+            </a:ln>
+          </p:spPr>
+          <p:style>
+            <a:lnRef idx="1">
+              <a:schemeClr val="accent1"/>
+            </a:lnRef>
+            <a:fillRef idx="0">
+              <a:schemeClr val="accent1"/>
+            </a:fillRef>
+            <a:effectRef idx="0">
+              <a:schemeClr val="accent1"/>
+            </a:effectRef>
+            <a:fontRef idx="minor">
+              <a:schemeClr val="tx1"/>
+            </a:fontRef>
+          </p:style>
+        </p:cxnSp>
+      </p:grpSp>
     </p:spTree>
     <p:extLst>
       <p:ext uri="{BB962C8B-B14F-4D97-AF65-F5344CB8AC3E}">
-        <p14:creationId xmlns:p14="http://schemas.microsoft.com/office/powerpoint/2010/main" val="4122932895"/>
+        <p14:creationId xmlns:p14="http://schemas.microsoft.com/office/powerpoint/2010/main" val="4141696463"/>
       </p:ext>
     </p:extLst>
   </p:cSld>
@@ -4049,7 +4385,7 @@
         <p:spPr>
           <a:xfrm>
             <a:off x="567542" y="491954"/>
-            <a:ext cx="2504212" cy="584775"/>
+            <a:ext cx="5929828" cy="584775"/>
           </a:xfrm>
           <a:prstGeom prst="rect">
             <a:avLst/>
@@ -4063,12 +4399,8 @@
           <a:lstStyle/>
           <a:p>
             <a:r>
-              <a:rPr kumimoji="1" lang="en-US" altLang="ja-JP" sz="3200" b="1" u="sng" dirty="0"/>
-              <a:t>DirectX</a:t>
-            </a:r>
-            <a:r>
               <a:rPr kumimoji="1" lang="ja-JP" altLang="en-US" sz="3200" b="1" u="sng" dirty="0"/>
-              <a:t>とは</a:t>
+              <a:t>ベクトルの内積による前後判定</a:t>
             </a:r>
           </a:p>
         </p:txBody>
@@ -4088,7 +4420,7 @@
         <p:spPr>
           <a:xfrm>
             <a:off x="567542" y="1216429"/>
-            <a:ext cx="11093101" cy="4154984"/>
+            <a:ext cx="9110186" cy="461665"/>
           </a:xfrm>
           <a:prstGeom prst="rect">
             <a:avLst/>
@@ -4102,131 +4434,2519 @@
           <a:lstStyle/>
           <a:p>
             <a:r>
-              <a:rPr lang="en-US" altLang="ja-JP" sz="2400" dirty="0"/>
-              <a:t>DirectX</a:t>
-            </a:r>
-            <a:r>
-              <a:rPr lang="ja-JP" altLang="en-US" sz="2400" dirty="0"/>
-              <a:t>があまりにも難易度が高いため、</a:t>
-            </a:r>
-            <a:endParaRPr lang="en-US" altLang="ja-JP" sz="2400" dirty="0"/>
-          </a:p>
-          <a:p>
+              <a:rPr kumimoji="1" lang="ja-JP" altLang="en-US" sz="2400" b="1" dirty="0">
+                <a:solidFill>
+                  <a:srgbClr val="00B050"/>
+                </a:solidFill>
+              </a:rPr>
+              <a:t>エネミーの向きを示すベクトル</a:t>
+            </a:r>
             <a:r>
               <a:rPr kumimoji="1" lang="ja-JP" altLang="en-US" sz="2400" dirty="0"/>
-              <a:t>それを簡単にまとめて使いやすくしてくれたのが</a:t>
-            </a:r>
-            <a:r>
-              <a:rPr kumimoji="1" lang="en-US" altLang="ja-JP" sz="2400" b="1" dirty="0" err="1">
+              <a:t>を</a:t>
+            </a:r>
+            <a:r>
+              <a:rPr kumimoji="1" lang="ja-JP" altLang="en-US" sz="2400" b="1" dirty="0">
                 <a:solidFill>
                   <a:srgbClr val="FF0000"/>
                 </a:solidFill>
               </a:rPr>
-              <a:t>DxLib</a:t>
+              <a:t>正規化</a:t>
             </a:r>
             <a:r>
               <a:rPr kumimoji="1" lang="ja-JP" altLang="en-US" sz="2400" dirty="0"/>
-              <a:t>になります。</a:t>
+              <a:t>した状態で用意します。</a:t>
             </a:r>
             <a:endParaRPr kumimoji="1" lang="en-US" altLang="ja-JP" sz="2400" dirty="0"/>
           </a:p>
-          <a:p>
-            <a:endParaRPr lang="en-US" altLang="ja-JP" sz="2400" dirty="0"/>
-          </a:p>
-          <a:p>
-            <a:r>
-              <a:rPr kumimoji="1" lang="en-US" altLang="ja-JP" sz="2400" dirty="0" err="1"/>
-              <a:t>DxLib</a:t>
-            </a:r>
-            <a:r>
-              <a:rPr kumimoji="1" lang="ja-JP" altLang="en-US" sz="2400" dirty="0"/>
-              <a:t>は</a:t>
-            </a:r>
-            <a:r>
-              <a:rPr kumimoji="1" lang="en-US" altLang="ja-JP" sz="2400" dirty="0"/>
-              <a:t>DirectX</a:t>
-            </a:r>
-            <a:r>
-              <a:rPr kumimoji="1" lang="ja-JP" altLang="en-US" sz="2400" dirty="0"/>
-              <a:t>の難しい部分を、</a:t>
-            </a:r>
-            <a:endParaRPr kumimoji="1" lang="en-US" altLang="ja-JP" sz="2400" dirty="0"/>
-          </a:p>
-          <a:p>
-            <a:r>
-              <a:rPr kumimoji="1" lang="en-US" altLang="ja-JP" sz="2400" dirty="0"/>
-              <a:t>C</a:t>
-            </a:r>
-            <a:r>
-              <a:rPr kumimoji="1" lang="ja-JP" altLang="en-US" sz="2400" dirty="0"/>
-              <a:t>言語の関数を呼ぶだけで簡単に使用できるように作られています。</a:t>
-            </a:r>
-            <a:endParaRPr kumimoji="1" lang="en-US" altLang="ja-JP" sz="2400" dirty="0"/>
-          </a:p>
-          <a:p>
-            <a:endParaRPr lang="en-US" altLang="ja-JP" sz="2400" dirty="0"/>
-          </a:p>
-          <a:p>
-            <a:r>
-              <a:rPr kumimoji="1" lang="ja-JP" altLang="en-US" sz="2400" dirty="0"/>
-              <a:t>昨今、</a:t>
-            </a:r>
-            <a:r>
-              <a:rPr kumimoji="1" lang="en-US" altLang="ja-JP" sz="2400" dirty="0"/>
-              <a:t>Unity</a:t>
-            </a:r>
-            <a:r>
-              <a:rPr lang="ja-JP" altLang="en-US" sz="2400" dirty="0"/>
-              <a:t>などのゲームエンジンも普及してきている中で、</a:t>
-            </a:r>
-            <a:endParaRPr lang="en-US" altLang="ja-JP" sz="2400" dirty="0"/>
-          </a:p>
-          <a:p>
-            <a:r>
-              <a:rPr kumimoji="1" lang="en-US" altLang="ja-JP" sz="2400" dirty="0"/>
-              <a:t>DirectX</a:t>
-            </a:r>
-            <a:r>
-              <a:rPr kumimoji="1" lang="ja-JP" altLang="en-US" sz="2400" dirty="0"/>
-              <a:t>の知識はゲーム業界もあまり必要としていないため、</a:t>
-            </a:r>
-            <a:endParaRPr kumimoji="1" lang="en-US" altLang="ja-JP" sz="2400" dirty="0"/>
-          </a:p>
-          <a:p>
-            <a:r>
-              <a:rPr lang="ja-JP" altLang="en-US" sz="2400" dirty="0"/>
-              <a:t>在学中は</a:t>
-            </a:r>
-            <a:r>
-              <a:rPr lang="en-US" altLang="ja-JP" sz="2400" dirty="0" err="1"/>
-              <a:t>DxLib</a:t>
-            </a:r>
-            <a:r>
-              <a:rPr lang="ja-JP" altLang="en-US" sz="2400" dirty="0"/>
-              <a:t>でゲームを制作していきます。</a:t>
-            </a:r>
-            <a:endParaRPr lang="en-US" altLang="ja-JP" sz="2400" dirty="0"/>
-          </a:p>
-          <a:p>
-            <a:endParaRPr kumimoji="1" lang="en-US" altLang="ja-JP" sz="2400" dirty="0"/>
-          </a:p>
-          <a:p>
-            <a:r>
-              <a:rPr kumimoji="1" lang="en-US" altLang="ja-JP" sz="2400" dirty="0"/>
-              <a:t>DirectX</a:t>
-            </a:r>
-            <a:r>
-              <a:rPr kumimoji="1" lang="ja-JP" altLang="en-US" sz="2400" dirty="0"/>
-              <a:t>は無料で使用できるので、興味のある方はチャレンジしてみては。。。</a:t>
-            </a:r>
-            <a:endParaRPr kumimoji="1" lang="en-US" altLang="ja-JP" sz="2400" dirty="0"/>
-          </a:p>
-        </p:txBody>
-      </p:sp>
+        </p:txBody>
+      </p:sp>
+      <p:grpSp>
+        <p:nvGrpSpPr>
+          <p:cNvPr id="2" name="グループ化 1">
+            <a:extLst>
+              <a:ext uri="{FF2B5EF4-FFF2-40B4-BE49-F238E27FC236}">
+                <a16:creationId xmlns:a16="http://schemas.microsoft.com/office/drawing/2014/main" id="{E0BB96CB-82B7-4CC9-A3D1-1EE218D50903}"/>
+              </a:ext>
+            </a:extLst>
+          </p:cNvPr>
+          <p:cNvGrpSpPr/>
+          <p:nvPr/>
+        </p:nvGrpSpPr>
+        <p:grpSpPr>
+          <a:xfrm>
+            <a:off x="567542" y="2187126"/>
+            <a:ext cx="6563042" cy="3476239"/>
+            <a:chOff x="567542" y="2187126"/>
+            <a:chExt cx="6563042" cy="3476239"/>
+          </a:xfrm>
+        </p:grpSpPr>
+        <p:grpSp>
+          <p:nvGrpSpPr>
+            <p:cNvPr id="22" name="グループ化 21">
+              <a:extLst>
+                <a:ext uri="{FF2B5EF4-FFF2-40B4-BE49-F238E27FC236}">
+                  <a16:creationId xmlns:a16="http://schemas.microsoft.com/office/drawing/2014/main" id="{26CBAC22-582A-4007-8EE4-9F2CD292A67D}"/>
+                </a:ext>
+              </a:extLst>
+            </p:cNvPr>
+            <p:cNvGrpSpPr/>
+            <p:nvPr/>
+          </p:nvGrpSpPr>
+          <p:grpSpPr>
+            <a:xfrm>
+              <a:off x="567542" y="2187126"/>
+              <a:ext cx="6563042" cy="3476239"/>
+              <a:chOff x="567542" y="2187126"/>
+              <a:chExt cx="6563042" cy="3476239"/>
+            </a:xfrm>
+          </p:grpSpPr>
+          <p:grpSp>
+            <p:nvGrpSpPr>
+              <p:cNvPr id="23" name="グループ化 22">
+                <a:extLst>
+                  <a:ext uri="{FF2B5EF4-FFF2-40B4-BE49-F238E27FC236}">
+                    <a16:creationId xmlns:a16="http://schemas.microsoft.com/office/drawing/2014/main" id="{9A9AF374-33CD-49DD-9C00-71B213B8D071}"/>
+                  </a:ext>
+                </a:extLst>
+              </p:cNvPr>
+              <p:cNvGrpSpPr/>
+              <p:nvPr/>
+            </p:nvGrpSpPr>
+            <p:grpSpPr>
+              <a:xfrm>
+                <a:off x="567542" y="2187126"/>
+                <a:ext cx="6563042" cy="3476239"/>
+                <a:chOff x="-567955" y="3002587"/>
+                <a:chExt cx="6563042" cy="3476239"/>
+              </a:xfrm>
+            </p:grpSpPr>
+            <p:pic>
+              <p:nvPicPr>
+                <p:cNvPr id="25" name="図 24">
+                  <a:extLst>
+                    <a:ext uri="{FF2B5EF4-FFF2-40B4-BE49-F238E27FC236}">
+                      <a16:creationId xmlns:a16="http://schemas.microsoft.com/office/drawing/2014/main" id="{6E52FB0F-347A-4558-9AC9-F9315F402500}"/>
+                    </a:ext>
+                  </a:extLst>
+                </p:cNvPr>
+                <p:cNvPicPr>
+                  <a:picLocks noChangeAspect="1"/>
+                </p:cNvPicPr>
+                <p:nvPr/>
+              </p:nvPicPr>
+              <p:blipFill>
+                <a:blip r:embed="rId2">
+                  <a:extLst>
+                    <a:ext uri="{28A0092B-C50C-407E-A947-70E740481C1C}">
+                      <a14:useLocalDpi xmlns:a14="http://schemas.microsoft.com/office/drawing/2010/main" val="0"/>
+                    </a:ext>
+                  </a:extLst>
+                </a:blip>
+                <a:stretch>
+                  <a:fillRect/>
+                </a:stretch>
+              </p:blipFill>
+              <p:spPr>
+                <a:xfrm>
+                  <a:off x="2233937" y="4089643"/>
+                  <a:ext cx="720931" cy="720931"/>
+                </a:xfrm>
+                <a:prstGeom prst="rect">
+                  <a:avLst/>
+                </a:prstGeom>
+              </p:spPr>
+            </p:pic>
+            <p:pic>
+              <p:nvPicPr>
+                <p:cNvPr id="26" name="図 25">
+                  <a:extLst>
+                    <a:ext uri="{FF2B5EF4-FFF2-40B4-BE49-F238E27FC236}">
+                      <a16:creationId xmlns:a16="http://schemas.microsoft.com/office/drawing/2014/main" id="{1B133F90-74CE-4FB3-9CED-683EF52C997B}"/>
+                    </a:ext>
+                  </a:extLst>
+                </p:cNvPr>
+                <p:cNvPicPr>
+                  <a:picLocks noChangeAspect="1"/>
+                </p:cNvPicPr>
+                <p:nvPr/>
+              </p:nvPicPr>
+              <p:blipFill>
+                <a:blip r:embed="rId3">
+                  <a:extLst>
+                    <a:ext uri="{28A0092B-C50C-407E-A947-70E740481C1C}">
+                      <a14:useLocalDpi xmlns:a14="http://schemas.microsoft.com/office/drawing/2010/main" val="0"/>
+                    </a:ext>
+                  </a:extLst>
+                </a:blip>
+                <a:stretch>
+                  <a:fillRect/>
+                </a:stretch>
+              </p:blipFill>
+              <p:spPr>
+                <a:xfrm>
+                  <a:off x="4757963" y="5390296"/>
+                  <a:ext cx="544265" cy="1088530"/>
+                </a:xfrm>
+                <a:prstGeom prst="rect">
+                  <a:avLst/>
+                </a:prstGeom>
+              </p:spPr>
+            </p:pic>
+            <p:cxnSp>
+              <p:nvCxnSpPr>
+                <p:cNvPr id="27" name="直線コネクタ 26">
+                  <a:extLst>
+                    <a:ext uri="{FF2B5EF4-FFF2-40B4-BE49-F238E27FC236}">
+                      <a16:creationId xmlns:a16="http://schemas.microsoft.com/office/drawing/2014/main" id="{1CA0F4AC-9AFE-4CD9-9B34-C95AB749E1F2}"/>
+                    </a:ext>
+                  </a:extLst>
+                </p:cNvPr>
+                <p:cNvCxnSpPr>
+                  <a:cxnSpLocks/>
+                </p:cNvCxnSpPr>
+                <p:nvPr/>
+              </p:nvCxnSpPr>
+              <p:spPr>
+                <a:xfrm>
+                  <a:off x="2594402" y="3002587"/>
+                  <a:ext cx="0" cy="3310467"/>
+                </a:xfrm>
+                <a:prstGeom prst="line">
+                  <a:avLst/>
+                </a:prstGeom>
+                <a:ln w="12700">
+                  <a:solidFill>
+                    <a:schemeClr val="tx1"/>
+                  </a:solidFill>
+                  <a:prstDash val="dash"/>
+                </a:ln>
+              </p:spPr>
+              <p:style>
+                <a:lnRef idx="1">
+                  <a:schemeClr val="accent1"/>
+                </a:lnRef>
+                <a:fillRef idx="0">
+                  <a:schemeClr val="accent1"/>
+                </a:fillRef>
+                <a:effectRef idx="0">
+                  <a:schemeClr val="accent1"/>
+                </a:effectRef>
+                <a:fontRef idx="minor">
+                  <a:schemeClr val="tx1"/>
+                </a:fontRef>
+              </p:style>
+            </p:cxnSp>
+            <p:sp>
+              <p:nvSpPr>
+                <p:cNvPr id="28" name="テキスト ボックス 27">
+                  <a:extLst>
+                    <a:ext uri="{FF2B5EF4-FFF2-40B4-BE49-F238E27FC236}">
+                      <a16:creationId xmlns:a16="http://schemas.microsoft.com/office/drawing/2014/main" id="{6E031525-69CE-48BB-9622-24A28F55AC92}"/>
+                    </a:ext>
+                  </a:extLst>
+                </p:cNvPr>
+                <p:cNvSpPr txBox="1"/>
+                <p:nvPr/>
+              </p:nvSpPr>
+              <p:spPr>
+                <a:xfrm>
+                  <a:off x="5502644" y="4219275"/>
+                  <a:ext cx="492443" cy="461665"/>
+                </a:xfrm>
+                <a:prstGeom prst="rect">
+                  <a:avLst/>
+                </a:prstGeom>
+                <a:noFill/>
+              </p:spPr>
+              <p:txBody>
+                <a:bodyPr wrap="none" rtlCol="0">
+                  <a:spAutoFit/>
+                </a:bodyPr>
+                <a:lstStyle/>
+                <a:p>
+                  <a:r>
+                    <a:rPr kumimoji="1" lang="ja-JP" altLang="en-US" sz="2400" b="1" dirty="0">
+                      <a:solidFill>
+                        <a:srgbClr val="FF0000"/>
+                      </a:solidFill>
+                    </a:rPr>
+                    <a:t>前</a:t>
+                  </a:r>
+                  <a:endParaRPr kumimoji="1" lang="en-US" altLang="ja-JP" sz="2400" b="1" dirty="0">
+                    <a:solidFill>
+                      <a:srgbClr val="FF0000"/>
+                    </a:solidFill>
+                  </a:endParaRPr>
+                </a:p>
+              </p:txBody>
+            </p:sp>
+            <p:sp>
+              <p:nvSpPr>
+                <p:cNvPr id="29" name="テキスト ボックス 28">
+                  <a:extLst>
+                    <a:ext uri="{FF2B5EF4-FFF2-40B4-BE49-F238E27FC236}">
+                      <a16:creationId xmlns:a16="http://schemas.microsoft.com/office/drawing/2014/main" id="{A5B27CAE-C64F-41EB-B4FD-44C2D8470E9D}"/>
+                    </a:ext>
+                  </a:extLst>
+                </p:cNvPr>
+                <p:cNvSpPr txBox="1"/>
+                <p:nvPr/>
+              </p:nvSpPr>
+              <p:spPr>
+                <a:xfrm>
+                  <a:off x="-567955" y="4219274"/>
+                  <a:ext cx="800219" cy="461665"/>
+                </a:xfrm>
+                <a:prstGeom prst="rect">
+                  <a:avLst/>
+                </a:prstGeom>
+                <a:noFill/>
+              </p:spPr>
+              <p:txBody>
+                <a:bodyPr wrap="none" rtlCol="0">
+                  <a:spAutoFit/>
+                </a:bodyPr>
+                <a:lstStyle/>
+                <a:p>
+                  <a:r>
+                    <a:rPr lang="ja-JP" altLang="en-US" sz="2400" b="1" dirty="0">
+                      <a:solidFill>
+                        <a:srgbClr val="FF0000"/>
+                      </a:solidFill>
+                    </a:rPr>
+                    <a:t>後ろ</a:t>
+                  </a:r>
+                  <a:endParaRPr kumimoji="1" lang="en-US" altLang="ja-JP" sz="2400" b="1" dirty="0">
+                    <a:solidFill>
+                      <a:srgbClr val="FF0000"/>
+                    </a:solidFill>
+                  </a:endParaRPr>
+                </a:p>
+              </p:txBody>
+            </p:sp>
+          </p:grpSp>
+          <p:cxnSp>
+            <p:nvCxnSpPr>
+              <p:cNvPr id="24" name="直線矢印コネクタ 23">
+                <a:extLst>
+                  <a:ext uri="{FF2B5EF4-FFF2-40B4-BE49-F238E27FC236}">
+                    <a16:creationId xmlns:a16="http://schemas.microsoft.com/office/drawing/2014/main" id="{1D22551C-554D-4EED-89BD-7D6278910D27}"/>
+                  </a:ext>
+                </a:extLst>
+              </p:cNvPr>
+              <p:cNvCxnSpPr/>
+              <p:nvPr/>
+            </p:nvCxnSpPr>
+            <p:spPr>
+              <a:xfrm>
+                <a:off x="3733800" y="3615267"/>
+                <a:ext cx="2175933" cy="990600"/>
+              </a:xfrm>
+              <a:prstGeom prst="straightConnector1">
+                <a:avLst/>
+              </a:prstGeom>
+              <a:ln w="38100">
+                <a:solidFill>
+                  <a:srgbClr val="FF0000"/>
+                </a:solidFill>
+                <a:tailEnd type="triangle"/>
+              </a:ln>
+            </p:spPr>
+            <p:style>
+              <a:lnRef idx="1">
+                <a:schemeClr val="accent1"/>
+              </a:lnRef>
+              <a:fillRef idx="0">
+                <a:schemeClr val="accent1"/>
+              </a:fillRef>
+              <a:effectRef idx="0">
+                <a:schemeClr val="accent1"/>
+              </a:effectRef>
+              <a:fontRef idx="minor">
+                <a:schemeClr val="tx1"/>
+              </a:fontRef>
+            </p:style>
+          </p:cxnSp>
+        </p:grpSp>
+        <p:cxnSp>
+          <p:nvCxnSpPr>
+            <p:cNvPr id="30" name="直線矢印コネクタ 29">
+              <a:extLst>
+                <a:ext uri="{FF2B5EF4-FFF2-40B4-BE49-F238E27FC236}">
+                  <a16:creationId xmlns:a16="http://schemas.microsoft.com/office/drawing/2014/main" id="{3F7AA074-263C-48E2-8D18-C91928C1096A}"/>
+                </a:ext>
+              </a:extLst>
+            </p:cNvPr>
+            <p:cNvCxnSpPr>
+              <a:cxnSpLocks/>
+            </p:cNvCxnSpPr>
+            <p:nvPr/>
+          </p:nvCxnSpPr>
+          <p:spPr>
+            <a:xfrm>
+              <a:off x="3733800" y="3609660"/>
+              <a:ext cx="553211" cy="5607"/>
+            </a:xfrm>
+            <a:prstGeom prst="straightConnector1">
+              <a:avLst/>
+            </a:prstGeom>
+            <a:ln w="38100">
+              <a:solidFill>
+                <a:srgbClr val="00B050"/>
+              </a:solidFill>
+              <a:tailEnd type="triangle"/>
+            </a:ln>
+          </p:spPr>
+          <p:style>
+            <a:lnRef idx="1">
+              <a:schemeClr val="accent1"/>
+            </a:lnRef>
+            <a:fillRef idx="0">
+              <a:schemeClr val="accent1"/>
+            </a:fillRef>
+            <a:effectRef idx="0">
+              <a:schemeClr val="accent1"/>
+            </a:effectRef>
+            <a:fontRef idx="minor">
+              <a:schemeClr val="tx1"/>
+            </a:fontRef>
+          </p:style>
+        </p:cxnSp>
+      </p:grpSp>
     </p:spTree>
     <p:extLst>
       <p:ext uri="{BB962C8B-B14F-4D97-AF65-F5344CB8AC3E}">
-        <p14:creationId xmlns:p14="http://schemas.microsoft.com/office/powerpoint/2010/main" val="1086491531"/>
+        <p14:creationId xmlns:p14="http://schemas.microsoft.com/office/powerpoint/2010/main" val="1843497912"/>
+      </p:ext>
+    </p:extLst>
+  </p:cSld>
+  <p:clrMapOvr>
+    <a:masterClrMapping/>
+  </p:clrMapOvr>
+</p:sld>
+</file>
+
+<file path=ppt/slides/slide4.xml><?xml version="1.0" encoding="utf-8"?>
+<p:sld xmlns:a="http://schemas.openxmlformats.org/drawingml/2006/main" xmlns:r="http://schemas.openxmlformats.org/officeDocument/2006/relationships" xmlns:p="http://schemas.openxmlformats.org/presentationml/2006/main">
+  <p:cSld>
+    <p:spTree>
+      <p:nvGrpSpPr>
+        <p:cNvPr id="1" name=""/>
+        <p:cNvGrpSpPr/>
+        <p:nvPr/>
+      </p:nvGrpSpPr>
+      <p:grpSpPr>
+        <a:xfrm>
+          <a:off x="0" y="0"/>
+          <a:ext cx="0" cy="0"/>
+          <a:chOff x="0" y="0"/>
+          <a:chExt cx="0" cy="0"/>
+        </a:xfrm>
+      </p:grpSpPr>
+      <p:sp>
+        <p:nvSpPr>
+          <p:cNvPr id="4" name="テキスト ボックス 3">
+            <a:extLst>
+              <a:ext uri="{FF2B5EF4-FFF2-40B4-BE49-F238E27FC236}">
+                <a16:creationId xmlns:a16="http://schemas.microsoft.com/office/drawing/2014/main" id="{5A13BF46-B8C5-48AA-8308-C9ECFF431A18}"/>
+              </a:ext>
+            </a:extLst>
+          </p:cNvPr>
+          <p:cNvSpPr txBox="1"/>
+          <p:nvPr/>
+        </p:nvSpPr>
+        <p:spPr>
+          <a:xfrm>
+            <a:off x="567542" y="491954"/>
+            <a:ext cx="5929828" cy="584775"/>
+          </a:xfrm>
+          <a:prstGeom prst="rect">
+            <a:avLst/>
+          </a:prstGeom>
+          <a:noFill/>
+        </p:spPr>
+        <p:txBody>
+          <a:bodyPr wrap="none" rtlCol="0">
+            <a:spAutoFit/>
+          </a:bodyPr>
+          <a:lstStyle/>
+          <a:p>
+            <a:r>
+              <a:rPr kumimoji="1" lang="ja-JP" altLang="en-US" sz="3200" b="1" u="sng" dirty="0"/>
+              <a:t>ベクトルの内積による前後判定</a:t>
+            </a:r>
+          </a:p>
+        </p:txBody>
+      </p:sp>
+      <p:sp>
+        <p:nvSpPr>
+          <p:cNvPr id="6" name="テキスト ボックス 5">
+            <a:extLst>
+              <a:ext uri="{FF2B5EF4-FFF2-40B4-BE49-F238E27FC236}">
+                <a16:creationId xmlns:a16="http://schemas.microsoft.com/office/drawing/2014/main" id="{55830AD6-028B-4C4E-80BF-B70DFC1C3A46}"/>
+              </a:ext>
+            </a:extLst>
+          </p:cNvPr>
+          <p:cNvSpPr txBox="1"/>
+          <p:nvPr/>
+        </p:nvSpPr>
+        <p:spPr>
+          <a:xfrm>
+            <a:off x="567542" y="1216429"/>
+            <a:ext cx="10033516" cy="461665"/>
+          </a:xfrm>
+          <a:prstGeom prst="rect">
+            <a:avLst/>
+          </a:prstGeom>
+          <a:noFill/>
+        </p:spPr>
+        <p:txBody>
+          <a:bodyPr wrap="none" rtlCol="0">
+            <a:spAutoFit/>
+          </a:bodyPr>
+          <a:lstStyle/>
+          <a:p>
+            <a:r>
+              <a:rPr kumimoji="1" lang="ja-JP" altLang="en-US" sz="2400" dirty="0"/>
+              <a:t>この２つのベクトルの内積を計算すると、</a:t>
+            </a:r>
+            <a:r>
+              <a:rPr kumimoji="1" lang="ja-JP" altLang="en-US" sz="2400" b="1" dirty="0"/>
+              <a:t>横の投影</a:t>
+            </a:r>
+            <a:r>
+              <a:rPr kumimoji="1" lang="ja-JP" altLang="en-US" sz="2400" dirty="0"/>
+              <a:t>が計算できます。</a:t>
+            </a:r>
+            <a:endParaRPr kumimoji="1" lang="en-US" altLang="ja-JP" sz="2400" dirty="0"/>
+          </a:p>
+        </p:txBody>
+      </p:sp>
+      <p:grpSp>
+        <p:nvGrpSpPr>
+          <p:cNvPr id="12" name="グループ化 11">
+            <a:extLst>
+              <a:ext uri="{FF2B5EF4-FFF2-40B4-BE49-F238E27FC236}">
+                <a16:creationId xmlns:a16="http://schemas.microsoft.com/office/drawing/2014/main" id="{0C004987-56DF-4F4C-ACAC-B6C83316B929}"/>
+              </a:ext>
+            </a:extLst>
+          </p:cNvPr>
+          <p:cNvGrpSpPr/>
+          <p:nvPr/>
+        </p:nvGrpSpPr>
+        <p:grpSpPr>
+          <a:xfrm>
+            <a:off x="567542" y="2187126"/>
+            <a:ext cx="6563042" cy="3476239"/>
+            <a:chOff x="567542" y="2187126"/>
+            <a:chExt cx="6563042" cy="3476239"/>
+          </a:xfrm>
+        </p:grpSpPr>
+        <p:cxnSp>
+          <p:nvCxnSpPr>
+            <p:cNvPr id="22" name="直線矢印コネクタ 21">
+              <a:extLst>
+                <a:ext uri="{FF2B5EF4-FFF2-40B4-BE49-F238E27FC236}">
+                  <a16:creationId xmlns:a16="http://schemas.microsoft.com/office/drawing/2014/main" id="{C1D8697C-CAD9-49C8-92BA-32EED2BE33F0}"/>
+                </a:ext>
+              </a:extLst>
+            </p:cNvPr>
+            <p:cNvCxnSpPr>
+              <a:cxnSpLocks/>
+            </p:cNvCxnSpPr>
+            <p:nvPr/>
+          </p:nvCxnSpPr>
+          <p:spPr>
+            <a:xfrm>
+              <a:off x="3729899" y="3609660"/>
+              <a:ext cx="2163561" cy="0"/>
+            </a:xfrm>
+            <a:prstGeom prst="straightConnector1">
+              <a:avLst/>
+            </a:prstGeom>
+            <a:ln w="38100">
+              <a:solidFill>
+                <a:schemeClr val="tx1"/>
+              </a:solidFill>
+              <a:tailEnd type="triangle"/>
+            </a:ln>
+          </p:spPr>
+          <p:style>
+            <a:lnRef idx="1">
+              <a:schemeClr val="accent1"/>
+            </a:lnRef>
+            <a:fillRef idx="0">
+              <a:schemeClr val="accent1"/>
+            </a:fillRef>
+            <a:effectRef idx="0">
+              <a:schemeClr val="accent1"/>
+            </a:effectRef>
+            <a:fontRef idx="minor">
+              <a:schemeClr val="tx1"/>
+            </a:fontRef>
+          </p:style>
+        </p:cxnSp>
+        <p:grpSp>
+          <p:nvGrpSpPr>
+            <p:cNvPr id="23" name="グループ化 22">
+              <a:extLst>
+                <a:ext uri="{FF2B5EF4-FFF2-40B4-BE49-F238E27FC236}">
+                  <a16:creationId xmlns:a16="http://schemas.microsoft.com/office/drawing/2014/main" id="{3F6367D5-F750-4DA5-9EF5-8D5B1EF80D62}"/>
+                </a:ext>
+              </a:extLst>
+            </p:cNvPr>
+            <p:cNvGrpSpPr/>
+            <p:nvPr/>
+          </p:nvGrpSpPr>
+          <p:grpSpPr>
+            <a:xfrm>
+              <a:off x="567542" y="2187126"/>
+              <a:ext cx="6563042" cy="3476239"/>
+              <a:chOff x="567542" y="2187126"/>
+              <a:chExt cx="6563042" cy="3476239"/>
+            </a:xfrm>
+          </p:grpSpPr>
+          <p:grpSp>
+            <p:nvGrpSpPr>
+              <p:cNvPr id="24" name="グループ化 23">
+                <a:extLst>
+                  <a:ext uri="{FF2B5EF4-FFF2-40B4-BE49-F238E27FC236}">
+                    <a16:creationId xmlns:a16="http://schemas.microsoft.com/office/drawing/2014/main" id="{9197872E-CC8D-4953-B5D0-7395C00677F3}"/>
+                  </a:ext>
+                </a:extLst>
+              </p:cNvPr>
+              <p:cNvGrpSpPr/>
+              <p:nvPr/>
+            </p:nvGrpSpPr>
+            <p:grpSpPr>
+              <a:xfrm>
+                <a:off x="567542" y="2187126"/>
+                <a:ext cx="6563042" cy="3476239"/>
+                <a:chOff x="567542" y="2187126"/>
+                <a:chExt cx="6563042" cy="3476239"/>
+              </a:xfrm>
+            </p:grpSpPr>
+            <p:grpSp>
+              <p:nvGrpSpPr>
+                <p:cNvPr id="26" name="グループ化 25">
+                  <a:extLst>
+                    <a:ext uri="{FF2B5EF4-FFF2-40B4-BE49-F238E27FC236}">
+                      <a16:creationId xmlns:a16="http://schemas.microsoft.com/office/drawing/2014/main" id="{5E3FE5ED-153C-4A4E-A14E-011F17A4CC80}"/>
+                    </a:ext>
+                  </a:extLst>
+                </p:cNvPr>
+                <p:cNvGrpSpPr/>
+                <p:nvPr/>
+              </p:nvGrpSpPr>
+              <p:grpSpPr>
+                <a:xfrm>
+                  <a:off x="567542" y="2187126"/>
+                  <a:ext cx="6563042" cy="3476239"/>
+                  <a:chOff x="-567955" y="3002587"/>
+                  <a:chExt cx="6563042" cy="3476239"/>
+                </a:xfrm>
+              </p:grpSpPr>
+              <p:pic>
+                <p:nvPicPr>
+                  <p:cNvPr id="28" name="図 27">
+                    <a:extLst>
+                      <a:ext uri="{FF2B5EF4-FFF2-40B4-BE49-F238E27FC236}">
+                        <a16:creationId xmlns:a16="http://schemas.microsoft.com/office/drawing/2014/main" id="{7675ECC5-4B8B-4147-B501-7023E43FCEDC}"/>
+                      </a:ext>
+                    </a:extLst>
+                  </p:cNvPr>
+                  <p:cNvPicPr>
+                    <a:picLocks noChangeAspect="1"/>
+                  </p:cNvPicPr>
+                  <p:nvPr/>
+                </p:nvPicPr>
+                <p:blipFill>
+                  <a:blip r:embed="rId2">
+                    <a:extLst>
+                      <a:ext uri="{28A0092B-C50C-407E-A947-70E740481C1C}">
+                        <a14:useLocalDpi xmlns:a14="http://schemas.microsoft.com/office/drawing/2010/main" val="0"/>
+                      </a:ext>
+                    </a:extLst>
+                  </a:blip>
+                  <a:stretch>
+                    <a:fillRect/>
+                  </a:stretch>
+                </p:blipFill>
+                <p:spPr>
+                  <a:xfrm>
+                    <a:off x="2233937" y="4089643"/>
+                    <a:ext cx="720931" cy="720931"/>
+                  </a:xfrm>
+                  <a:prstGeom prst="rect">
+                    <a:avLst/>
+                  </a:prstGeom>
+                </p:spPr>
+              </p:pic>
+              <p:pic>
+                <p:nvPicPr>
+                  <p:cNvPr id="29" name="図 28">
+                    <a:extLst>
+                      <a:ext uri="{FF2B5EF4-FFF2-40B4-BE49-F238E27FC236}">
+                        <a16:creationId xmlns:a16="http://schemas.microsoft.com/office/drawing/2014/main" id="{84CB62A5-A343-41E0-AAB2-8738C894C872}"/>
+                      </a:ext>
+                    </a:extLst>
+                  </p:cNvPr>
+                  <p:cNvPicPr>
+                    <a:picLocks noChangeAspect="1"/>
+                  </p:cNvPicPr>
+                  <p:nvPr/>
+                </p:nvPicPr>
+                <p:blipFill>
+                  <a:blip r:embed="rId3">
+                    <a:extLst>
+                      <a:ext uri="{28A0092B-C50C-407E-A947-70E740481C1C}">
+                        <a14:useLocalDpi xmlns:a14="http://schemas.microsoft.com/office/drawing/2010/main" val="0"/>
+                      </a:ext>
+                    </a:extLst>
+                  </a:blip>
+                  <a:stretch>
+                    <a:fillRect/>
+                  </a:stretch>
+                </p:blipFill>
+                <p:spPr>
+                  <a:xfrm>
+                    <a:off x="4757963" y="5390296"/>
+                    <a:ext cx="544265" cy="1088530"/>
+                  </a:xfrm>
+                  <a:prstGeom prst="rect">
+                    <a:avLst/>
+                  </a:prstGeom>
+                </p:spPr>
+              </p:pic>
+              <p:cxnSp>
+                <p:nvCxnSpPr>
+                  <p:cNvPr id="30" name="直線コネクタ 29">
+                    <a:extLst>
+                      <a:ext uri="{FF2B5EF4-FFF2-40B4-BE49-F238E27FC236}">
+                        <a16:creationId xmlns:a16="http://schemas.microsoft.com/office/drawing/2014/main" id="{187D0252-69E6-4891-ADDB-6365C2CC9305}"/>
+                      </a:ext>
+                    </a:extLst>
+                  </p:cNvPr>
+                  <p:cNvCxnSpPr>
+                    <a:cxnSpLocks/>
+                  </p:cNvCxnSpPr>
+                  <p:nvPr/>
+                </p:nvCxnSpPr>
+                <p:spPr>
+                  <a:xfrm>
+                    <a:off x="2594402" y="3002587"/>
+                    <a:ext cx="0" cy="3310467"/>
+                  </a:xfrm>
+                  <a:prstGeom prst="line">
+                    <a:avLst/>
+                  </a:prstGeom>
+                  <a:ln w="12700">
+                    <a:solidFill>
+                      <a:schemeClr val="tx1"/>
+                    </a:solidFill>
+                    <a:prstDash val="dash"/>
+                  </a:ln>
+                </p:spPr>
+                <p:style>
+                  <a:lnRef idx="1">
+                    <a:schemeClr val="accent1"/>
+                  </a:lnRef>
+                  <a:fillRef idx="0">
+                    <a:schemeClr val="accent1"/>
+                  </a:fillRef>
+                  <a:effectRef idx="0">
+                    <a:schemeClr val="accent1"/>
+                  </a:effectRef>
+                  <a:fontRef idx="minor">
+                    <a:schemeClr val="tx1"/>
+                  </a:fontRef>
+                </p:style>
+              </p:cxnSp>
+              <p:sp>
+                <p:nvSpPr>
+                  <p:cNvPr id="31" name="テキスト ボックス 30">
+                    <a:extLst>
+                      <a:ext uri="{FF2B5EF4-FFF2-40B4-BE49-F238E27FC236}">
+                        <a16:creationId xmlns:a16="http://schemas.microsoft.com/office/drawing/2014/main" id="{474E5C5C-F7CB-4DD7-B5B5-2B655A95CCA7}"/>
+                      </a:ext>
+                    </a:extLst>
+                  </p:cNvPr>
+                  <p:cNvSpPr txBox="1"/>
+                  <p:nvPr/>
+                </p:nvSpPr>
+                <p:spPr>
+                  <a:xfrm>
+                    <a:off x="5502644" y="4219275"/>
+                    <a:ext cx="492443" cy="461665"/>
+                  </a:xfrm>
+                  <a:prstGeom prst="rect">
+                    <a:avLst/>
+                  </a:prstGeom>
+                  <a:noFill/>
+                </p:spPr>
+                <p:txBody>
+                  <a:bodyPr wrap="none" rtlCol="0">
+                    <a:spAutoFit/>
+                  </a:bodyPr>
+                  <a:lstStyle/>
+                  <a:p>
+                    <a:r>
+                      <a:rPr kumimoji="1" lang="ja-JP" altLang="en-US" sz="2400" b="1" dirty="0">
+                        <a:solidFill>
+                          <a:srgbClr val="FF0000"/>
+                        </a:solidFill>
+                      </a:rPr>
+                      <a:t>前</a:t>
+                    </a:r>
+                    <a:endParaRPr kumimoji="1" lang="en-US" altLang="ja-JP" sz="2400" b="1" dirty="0">
+                      <a:solidFill>
+                        <a:srgbClr val="FF0000"/>
+                      </a:solidFill>
+                    </a:endParaRPr>
+                  </a:p>
+                </p:txBody>
+              </p:sp>
+              <p:sp>
+                <p:nvSpPr>
+                  <p:cNvPr id="32" name="テキスト ボックス 31">
+                    <a:extLst>
+                      <a:ext uri="{FF2B5EF4-FFF2-40B4-BE49-F238E27FC236}">
+                        <a16:creationId xmlns:a16="http://schemas.microsoft.com/office/drawing/2014/main" id="{A9633ACC-03ED-4E64-9CEB-5EFB9744777E}"/>
+                      </a:ext>
+                    </a:extLst>
+                  </p:cNvPr>
+                  <p:cNvSpPr txBox="1"/>
+                  <p:nvPr/>
+                </p:nvSpPr>
+                <p:spPr>
+                  <a:xfrm>
+                    <a:off x="-567955" y="4219274"/>
+                    <a:ext cx="800219" cy="461665"/>
+                  </a:xfrm>
+                  <a:prstGeom prst="rect">
+                    <a:avLst/>
+                  </a:prstGeom>
+                  <a:noFill/>
+                </p:spPr>
+                <p:txBody>
+                  <a:bodyPr wrap="none" rtlCol="0">
+                    <a:spAutoFit/>
+                  </a:bodyPr>
+                  <a:lstStyle/>
+                  <a:p>
+                    <a:r>
+                      <a:rPr lang="ja-JP" altLang="en-US" sz="2400" b="1" dirty="0">
+                        <a:solidFill>
+                          <a:srgbClr val="FF0000"/>
+                        </a:solidFill>
+                      </a:rPr>
+                      <a:t>後ろ</a:t>
+                    </a:r>
+                    <a:endParaRPr kumimoji="1" lang="en-US" altLang="ja-JP" sz="2400" b="1" dirty="0">
+                      <a:solidFill>
+                        <a:srgbClr val="FF0000"/>
+                      </a:solidFill>
+                    </a:endParaRPr>
+                  </a:p>
+                </p:txBody>
+              </p:sp>
+            </p:grpSp>
+            <p:cxnSp>
+              <p:nvCxnSpPr>
+                <p:cNvPr id="27" name="直線矢印コネクタ 26">
+                  <a:extLst>
+                    <a:ext uri="{FF2B5EF4-FFF2-40B4-BE49-F238E27FC236}">
+                      <a16:creationId xmlns:a16="http://schemas.microsoft.com/office/drawing/2014/main" id="{34D75175-3BE5-4DCC-8517-1EE89146FFA4}"/>
+                    </a:ext>
+                  </a:extLst>
+                </p:cNvPr>
+                <p:cNvCxnSpPr/>
+                <p:nvPr/>
+              </p:nvCxnSpPr>
+              <p:spPr>
+                <a:xfrm>
+                  <a:off x="3733800" y="3615267"/>
+                  <a:ext cx="2175933" cy="990600"/>
+                </a:xfrm>
+                <a:prstGeom prst="straightConnector1">
+                  <a:avLst/>
+                </a:prstGeom>
+                <a:ln w="38100">
+                  <a:solidFill>
+                    <a:srgbClr val="FF0000"/>
+                  </a:solidFill>
+                  <a:tailEnd type="triangle"/>
+                </a:ln>
+              </p:spPr>
+              <p:style>
+                <a:lnRef idx="1">
+                  <a:schemeClr val="accent1"/>
+                </a:lnRef>
+                <a:fillRef idx="0">
+                  <a:schemeClr val="accent1"/>
+                </a:fillRef>
+                <a:effectRef idx="0">
+                  <a:schemeClr val="accent1"/>
+                </a:effectRef>
+                <a:fontRef idx="minor">
+                  <a:schemeClr val="tx1"/>
+                </a:fontRef>
+              </p:style>
+            </p:cxnSp>
+          </p:grpSp>
+          <p:cxnSp>
+            <p:nvCxnSpPr>
+              <p:cNvPr id="25" name="直線矢印コネクタ 24">
+                <a:extLst>
+                  <a:ext uri="{FF2B5EF4-FFF2-40B4-BE49-F238E27FC236}">
+                    <a16:creationId xmlns:a16="http://schemas.microsoft.com/office/drawing/2014/main" id="{EC42DDAF-6BA1-421A-9EB8-4F1D98A4794F}"/>
+                  </a:ext>
+                </a:extLst>
+              </p:cNvPr>
+              <p:cNvCxnSpPr>
+                <a:cxnSpLocks/>
+              </p:cNvCxnSpPr>
+              <p:nvPr/>
+            </p:nvCxnSpPr>
+            <p:spPr>
+              <a:xfrm>
+                <a:off x="3733800" y="3609660"/>
+                <a:ext cx="553211" cy="5607"/>
+              </a:xfrm>
+              <a:prstGeom prst="straightConnector1">
+                <a:avLst/>
+              </a:prstGeom>
+              <a:ln w="38100">
+                <a:solidFill>
+                  <a:srgbClr val="00B050"/>
+                </a:solidFill>
+                <a:tailEnd type="triangle"/>
+              </a:ln>
+            </p:spPr>
+            <p:style>
+              <a:lnRef idx="1">
+                <a:schemeClr val="accent1"/>
+              </a:lnRef>
+              <a:fillRef idx="0">
+                <a:schemeClr val="accent1"/>
+              </a:fillRef>
+              <a:effectRef idx="0">
+                <a:schemeClr val="accent1"/>
+              </a:effectRef>
+              <a:fontRef idx="minor">
+                <a:schemeClr val="tx1"/>
+              </a:fontRef>
+            </p:style>
+          </p:cxnSp>
+        </p:grpSp>
+        <p:cxnSp>
+          <p:nvCxnSpPr>
+            <p:cNvPr id="11" name="直線コネクタ 10">
+              <a:extLst>
+                <a:ext uri="{FF2B5EF4-FFF2-40B4-BE49-F238E27FC236}">
+                  <a16:creationId xmlns:a16="http://schemas.microsoft.com/office/drawing/2014/main" id="{1BD2EC8D-D93B-4C0E-8AC7-D2EFAF74E046}"/>
+                </a:ext>
+              </a:extLst>
+            </p:cNvPr>
+            <p:cNvCxnSpPr/>
+            <p:nvPr/>
+          </p:nvCxnSpPr>
+          <p:spPr>
+            <a:xfrm>
+              <a:off x="5893460" y="2548467"/>
+              <a:ext cx="0" cy="2379133"/>
+            </a:xfrm>
+            <a:prstGeom prst="line">
+              <a:avLst/>
+            </a:prstGeom>
+            <a:ln w="38100">
+              <a:solidFill>
+                <a:schemeClr val="tx1"/>
+              </a:solidFill>
+              <a:prstDash val="dash"/>
+            </a:ln>
+          </p:spPr>
+          <p:style>
+            <a:lnRef idx="1">
+              <a:schemeClr val="accent1"/>
+            </a:lnRef>
+            <a:fillRef idx="0">
+              <a:schemeClr val="accent1"/>
+            </a:fillRef>
+            <a:effectRef idx="0">
+              <a:schemeClr val="accent1"/>
+            </a:effectRef>
+            <a:fontRef idx="minor">
+              <a:schemeClr val="tx1"/>
+            </a:fontRef>
+          </p:style>
+        </p:cxnSp>
+      </p:grpSp>
+    </p:spTree>
+    <p:extLst>
+      <p:ext uri="{BB962C8B-B14F-4D97-AF65-F5344CB8AC3E}">
+        <p14:creationId xmlns:p14="http://schemas.microsoft.com/office/powerpoint/2010/main" val="1674146951"/>
+      </p:ext>
+    </p:extLst>
+  </p:cSld>
+  <p:clrMapOvr>
+    <a:masterClrMapping/>
+  </p:clrMapOvr>
+</p:sld>
+</file>
+
+<file path=ppt/slides/slide5.xml><?xml version="1.0" encoding="utf-8"?>
+<p:sld xmlns:a="http://schemas.openxmlformats.org/drawingml/2006/main" xmlns:r="http://schemas.openxmlformats.org/officeDocument/2006/relationships" xmlns:p="http://schemas.openxmlformats.org/presentationml/2006/main">
+  <p:cSld>
+    <p:spTree>
+      <p:nvGrpSpPr>
+        <p:cNvPr id="1" name=""/>
+        <p:cNvGrpSpPr/>
+        <p:nvPr/>
+      </p:nvGrpSpPr>
+      <p:grpSpPr>
+        <a:xfrm>
+          <a:off x="0" y="0"/>
+          <a:ext cx="0" cy="0"/>
+          <a:chOff x="0" y="0"/>
+          <a:chExt cx="0" cy="0"/>
+        </a:xfrm>
+      </p:grpSpPr>
+      <p:sp>
+        <p:nvSpPr>
+          <p:cNvPr id="2" name="四角形: 角を丸くする 1">
+            <a:extLst>
+              <a:ext uri="{FF2B5EF4-FFF2-40B4-BE49-F238E27FC236}">
+                <a16:creationId xmlns:a16="http://schemas.microsoft.com/office/drawing/2014/main" id="{97A69407-54D6-4CF5-8302-DBF494960E13}"/>
+              </a:ext>
+            </a:extLst>
+          </p:cNvPr>
+          <p:cNvSpPr/>
+          <p:nvPr/>
+        </p:nvSpPr>
+        <p:spPr>
+          <a:xfrm>
+            <a:off x="6999515" y="4896625"/>
+            <a:ext cx="5014680" cy="1605712"/>
+          </a:xfrm>
+          <a:prstGeom prst="roundRect">
+            <a:avLst/>
+          </a:prstGeom>
+          <a:solidFill>
+            <a:schemeClr val="bg2"/>
+          </a:solidFill>
+          <a:ln>
+            <a:noFill/>
+          </a:ln>
+        </p:spPr>
+        <p:style>
+          <a:lnRef idx="2">
+            <a:schemeClr val="accent1">
+              <a:shade val="50000"/>
+            </a:schemeClr>
+          </a:lnRef>
+          <a:fillRef idx="1">
+            <a:schemeClr val="accent1"/>
+          </a:fillRef>
+          <a:effectRef idx="0">
+            <a:schemeClr val="accent1"/>
+          </a:effectRef>
+          <a:fontRef idx="minor">
+            <a:schemeClr val="lt1"/>
+          </a:fontRef>
+        </p:style>
+        <p:txBody>
+          <a:bodyPr rtlCol="0" anchor="ctr"/>
+          <a:lstStyle/>
+          <a:p>
+            <a:pPr algn="ctr"/>
+            <a:endParaRPr kumimoji="1" lang="ja-JP" altLang="en-US"/>
+          </a:p>
+        </p:txBody>
+      </p:sp>
+      <p:sp>
+        <p:nvSpPr>
+          <p:cNvPr id="4" name="テキスト ボックス 3">
+            <a:extLst>
+              <a:ext uri="{FF2B5EF4-FFF2-40B4-BE49-F238E27FC236}">
+                <a16:creationId xmlns:a16="http://schemas.microsoft.com/office/drawing/2014/main" id="{5A13BF46-B8C5-48AA-8308-C9ECFF431A18}"/>
+              </a:ext>
+            </a:extLst>
+          </p:cNvPr>
+          <p:cNvSpPr txBox="1"/>
+          <p:nvPr/>
+        </p:nvSpPr>
+        <p:spPr>
+          <a:xfrm>
+            <a:off x="567542" y="491954"/>
+            <a:ext cx="5929828" cy="584775"/>
+          </a:xfrm>
+          <a:prstGeom prst="rect">
+            <a:avLst/>
+          </a:prstGeom>
+          <a:noFill/>
+        </p:spPr>
+        <p:txBody>
+          <a:bodyPr wrap="none" rtlCol="0">
+            <a:spAutoFit/>
+          </a:bodyPr>
+          <a:lstStyle/>
+          <a:p>
+            <a:r>
+              <a:rPr kumimoji="1" lang="ja-JP" altLang="en-US" sz="3200" b="1" u="sng" dirty="0"/>
+              <a:t>ベクトルの内積による前後判定</a:t>
+            </a:r>
+          </a:p>
+        </p:txBody>
+      </p:sp>
+      <p:sp>
+        <p:nvSpPr>
+          <p:cNvPr id="6" name="テキスト ボックス 5">
+            <a:extLst>
+              <a:ext uri="{FF2B5EF4-FFF2-40B4-BE49-F238E27FC236}">
+                <a16:creationId xmlns:a16="http://schemas.microsoft.com/office/drawing/2014/main" id="{55830AD6-028B-4C4E-80BF-B70DFC1C3A46}"/>
+              </a:ext>
+            </a:extLst>
+          </p:cNvPr>
+          <p:cNvSpPr txBox="1"/>
+          <p:nvPr/>
+        </p:nvSpPr>
+        <p:spPr>
+          <a:xfrm>
+            <a:off x="567542" y="1216429"/>
+            <a:ext cx="7571303" cy="461665"/>
+          </a:xfrm>
+          <a:prstGeom prst="rect">
+            <a:avLst/>
+          </a:prstGeom>
+          <a:noFill/>
+        </p:spPr>
+        <p:txBody>
+          <a:bodyPr wrap="none" rtlCol="0">
+            <a:spAutoFit/>
+          </a:bodyPr>
+          <a:lstStyle/>
+          <a:p>
+            <a:r>
+              <a:rPr kumimoji="1" lang="ja-JP" altLang="en-US" sz="2400" b="1" dirty="0">
+                <a:solidFill>
+                  <a:srgbClr val="FF0000"/>
+                </a:solidFill>
+              </a:rPr>
+              <a:t>投影が右に伸びていれば前側にいる</a:t>
+            </a:r>
+            <a:r>
+              <a:rPr kumimoji="1" lang="ja-JP" altLang="en-US" sz="2400" dirty="0"/>
+              <a:t>と判定できます。</a:t>
+            </a:r>
+            <a:endParaRPr kumimoji="1" lang="en-US" altLang="ja-JP" sz="2400" dirty="0"/>
+          </a:p>
+        </p:txBody>
+      </p:sp>
+      <p:sp>
+        <p:nvSpPr>
+          <p:cNvPr id="23" name="テキスト ボックス 22">
+            <a:extLst>
+              <a:ext uri="{FF2B5EF4-FFF2-40B4-BE49-F238E27FC236}">
+                <a16:creationId xmlns:a16="http://schemas.microsoft.com/office/drawing/2014/main" id="{66500EF5-7678-40D1-8264-8FEE93DCE207}"/>
+              </a:ext>
+            </a:extLst>
+          </p:cNvPr>
+          <p:cNvSpPr txBox="1"/>
+          <p:nvPr/>
+        </p:nvSpPr>
+        <p:spPr>
+          <a:xfrm>
+            <a:off x="7094288" y="4932677"/>
+            <a:ext cx="5109091" cy="1569660"/>
+          </a:xfrm>
+          <a:prstGeom prst="rect">
+            <a:avLst/>
+          </a:prstGeom>
+          <a:noFill/>
+        </p:spPr>
+        <p:txBody>
+          <a:bodyPr wrap="none" rtlCol="0">
+            <a:spAutoFit/>
+          </a:bodyPr>
+          <a:lstStyle/>
+          <a:p>
+            <a:r>
+              <a:rPr kumimoji="1" lang="en-US" altLang="ja-JP" sz="2400" b="1" dirty="0">
+                <a:solidFill>
+                  <a:srgbClr val="00B050"/>
+                </a:solidFill>
+              </a:rPr>
+              <a:t>MEMO</a:t>
+            </a:r>
+          </a:p>
+          <a:p>
+            <a:r>
+              <a:rPr kumimoji="1" lang="ja-JP" altLang="en-US" sz="2400" dirty="0"/>
+              <a:t>スクリーン座標系は</a:t>
+            </a:r>
+            <a:r>
+              <a:rPr kumimoji="1" lang="ja-JP" altLang="en-US" sz="2400" b="1" dirty="0">
+                <a:solidFill>
+                  <a:srgbClr val="FF0000"/>
+                </a:solidFill>
+              </a:rPr>
+              <a:t>右に正</a:t>
+            </a:r>
+            <a:r>
+              <a:rPr kumimoji="1" lang="ja-JP" altLang="en-US" sz="2400" dirty="0"/>
+              <a:t>なので、</a:t>
+            </a:r>
+            <a:endParaRPr kumimoji="1" lang="en-US" altLang="ja-JP" sz="2400" dirty="0"/>
+          </a:p>
+          <a:p>
+            <a:r>
+              <a:rPr lang="ja-JP" altLang="en-US" sz="2400" b="1" dirty="0">
+                <a:solidFill>
+                  <a:srgbClr val="FF0000"/>
+                </a:solidFill>
+              </a:rPr>
+              <a:t>投影が右に伸びるということは、</a:t>
+            </a:r>
+            <a:endParaRPr lang="en-US" altLang="ja-JP" sz="2400" b="1" dirty="0">
+              <a:solidFill>
+                <a:srgbClr val="FF0000"/>
+              </a:solidFill>
+            </a:endParaRPr>
+          </a:p>
+          <a:p>
+            <a:r>
+              <a:rPr kumimoji="1" lang="ja-JP" altLang="en-US" sz="2400" b="1" dirty="0">
+                <a:solidFill>
+                  <a:srgbClr val="FF0000"/>
+                </a:solidFill>
+              </a:rPr>
+              <a:t>内積の計算結果が正</a:t>
+            </a:r>
+            <a:r>
+              <a:rPr kumimoji="1" lang="ja-JP" altLang="en-US" sz="2400" dirty="0"/>
+              <a:t>ということ。</a:t>
+            </a:r>
+            <a:endParaRPr kumimoji="1" lang="en-US" altLang="ja-JP" sz="2400" dirty="0"/>
+          </a:p>
+        </p:txBody>
+      </p:sp>
+      <p:grpSp>
+        <p:nvGrpSpPr>
+          <p:cNvPr id="22" name="グループ化 21">
+            <a:extLst>
+              <a:ext uri="{FF2B5EF4-FFF2-40B4-BE49-F238E27FC236}">
+                <a16:creationId xmlns:a16="http://schemas.microsoft.com/office/drawing/2014/main" id="{663AD13C-E0D9-4735-9DA3-F6F8F51D8EA9}"/>
+              </a:ext>
+            </a:extLst>
+          </p:cNvPr>
+          <p:cNvGrpSpPr/>
+          <p:nvPr/>
+        </p:nvGrpSpPr>
+        <p:grpSpPr>
+          <a:xfrm>
+            <a:off x="567542" y="2187126"/>
+            <a:ext cx="6563042" cy="3476239"/>
+            <a:chOff x="567542" y="2187126"/>
+            <a:chExt cx="6563042" cy="3476239"/>
+          </a:xfrm>
+        </p:grpSpPr>
+        <p:cxnSp>
+          <p:nvCxnSpPr>
+            <p:cNvPr id="25" name="直線矢印コネクタ 24">
+              <a:extLst>
+                <a:ext uri="{FF2B5EF4-FFF2-40B4-BE49-F238E27FC236}">
+                  <a16:creationId xmlns:a16="http://schemas.microsoft.com/office/drawing/2014/main" id="{277F5A6E-5FE8-48CB-94A3-A68421343499}"/>
+                </a:ext>
+              </a:extLst>
+            </p:cNvPr>
+            <p:cNvCxnSpPr>
+              <a:cxnSpLocks/>
+            </p:cNvCxnSpPr>
+            <p:nvPr/>
+          </p:nvCxnSpPr>
+          <p:spPr>
+            <a:xfrm>
+              <a:off x="3729899" y="3609660"/>
+              <a:ext cx="2163561" cy="0"/>
+            </a:xfrm>
+            <a:prstGeom prst="straightConnector1">
+              <a:avLst/>
+            </a:prstGeom>
+            <a:ln w="38100">
+              <a:solidFill>
+                <a:schemeClr val="tx1"/>
+              </a:solidFill>
+              <a:tailEnd type="triangle"/>
+            </a:ln>
+          </p:spPr>
+          <p:style>
+            <a:lnRef idx="1">
+              <a:schemeClr val="accent1"/>
+            </a:lnRef>
+            <a:fillRef idx="0">
+              <a:schemeClr val="accent1"/>
+            </a:fillRef>
+            <a:effectRef idx="0">
+              <a:schemeClr val="accent1"/>
+            </a:effectRef>
+            <a:fontRef idx="minor">
+              <a:schemeClr val="tx1"/>
+            </a:fontRef>
+          </p:style>
+        </p:cxnSp>
+        <p:grpSp>
+          <p:nvGrpSpPr>
+            <p:cNvPr id="26" name="グループ化 25">
+              <a:extLst>
+                <a:ext uri="{FF2B5EF4-FFF2-40B4-BE49-F238E27FC236}">
+                  <a16:creationId xmlns:a16="http://schemas.microsoft.com/office/drawing/2014/main" id="{02D76EE8-2B31-41A5-948B-DA694C43A121}"/>
+                </a:ext>
+              </a:extLst>
+            </p:cNvPr>
+            <p:cNvGrpSpPr/>
+            <p:nvPr/>
+          </p:nvGrpSpPr>
+          <p:grpSpPr>
+            <a:xfrm>
+              <a:off x="567542" y="2187126"/>
+              <a:ext cx="6563042" cy="3476239"/>
+              <a:chOff x="567542" y="2187126"/>
+              <a:chExt cx="6563042" cy="3476239"/>
+            </a:xfrm>
+          </p:grpSpPr>
+          <p:grpSp>
+            <p:nvGrpSpPr>
+              <p:cNvPr id="28" name="グループ化 27">
+                <a:extLst>
+                  <a:ext uri="{FF2B5EF4-FFF2-40B4-BE49-F238E27FC236}">
+                    <a16:creationId xmlns:a16="http://schemas.microsoft.com/office/drawing/2014/main" id="{6B521004-8F3B-4724-BC47-8CB4738801BF}"/>
+                  </a:ext>
+                </a:extLst>
+              </p:cNvPr>
+              <p:cNvGrpSpPr/>
+              <p:nvPr/>
+            </p:nvGrpSpPr>
+            <p:grpSpPr>
+              <a:xfrm>
+                <a:off x="567542" y="2187126"/>
+                <a:ext cx="6563042" cy="3476239"/>
+                <a:chOff x="567542" y="2187126"/>
+                <a:chExt cx="6563042" cy="3476239"/>
+              </a:xfrm>
+            </p:grpSpPr>
+            <p:grpSp>
+              <p:nvGrpSpPr>
+                <p:cNvPr id="30" name="グループ化 29">
+                  <a:extLst>
+                    <a:ext uri="{FF2B5EF4-FFF2-40B4-BE49-F238E27FC236}">
+                      <a16:creationId xmlns:a16="http://schemas.microsoft.com/office/drawing/2014/main" id="{A5BB48BF-A040-4C73-8E89-179B8EEBBCB0}"/>
+                    </a:ext>
+                  </a:extLst>
+                </p:cNvPr>
+                <p:cNvGrpSpPr/>
+                <p:nvPr/>
+              </p:nvGrpSpPr>
+              <p:grpSpPr>
+                <a:xfrm>
+                  <a:off x="567542" y="2187126"/>
+                  <a:ext cx="6563042" cy="3476239"/>
+                  <a:chOff x="-567955" y="3002587"/>
+                  <a:chExt cx="6563042" cy="3476239"/>
+                </a:xfrm>
+              </p:grpSpPr>
+              <p:pic>
+                <p:nvPicPr>
+                  <p:cNvPr id="32" name="図 31">
+                    <a:extLst>
+                      <a:ext uri="{FF2B5EF4-FFF2-40B4-BE49-F238E27FC236}">
+                        <a16:creationId xmlns:a16="http://schemas.microsoft.com/office/drawing/2014/main" id="{0DF50D1E-B537-458D-82EF-8742F87F5F07}"/>
+                      </a:ext>
+                    </a:extLst>
+                  </p:cNvPr>
+                  <p:cNvPicPr>
+                    <a:picLocks noChangeAspect="1"/>
+                  </p:cNvPicPr>
+                  <p:nvPr/>
+                </p:nvPicPr>
+                <p:blipFill>
+                  <a:blip r:embed="rId2">
+                    <a:extLst>
+                      <a:ext uri="{28A0092B-C50C-407E-A947-70E740481C1C}">
+                        <a14:useLocalDpi xmlns:a14="http://schemas.microsoft.com/office/drawing/2010/main" val="0"/>
+                      </a:ext>
+                    </a:extLst>
+                  </a:blip>
+                  <a:stretch>
+                    <a:fillRect/>
+                  </a:stretch>
+                </p:blipFill>
+                <p:spPr>
+                  <a:xfrm>
+                    <a:off x="2233937" y="4089643"/>
+                    <a:ext cx="720931" cy="720931"/>
+                  </a:xfrm>
+                  <a:prstGeom prst="rect">
+                    <a:avLst/>
+                  </a:prstGeom>
+                </p:spPr>
+              </p:pic>
+              <p:pic>
+                <p:nvPicPr>
+                  <p:cNvPr id="33" name="図 32">
+                    <a:extLst>
+                      <a:ext uri="{FF2B5EF4-FFF2-40B4-BE49-F238E27FC236}">
+                        <a16:creationId xmlns:a16="http://schemas.microsoft.com/office/drawing/2014/main" id="{1E7564B3-771E-4843-8640-43700E5E9882}"/>
+                      </a:ext>
+                    </a:extLst>
+                  </p:cNvPr>
+                  <p:cNvPicPr>
+                    <a:picLocks noChangeAspect="1"/>
+                  </p:cNvPicPr>
+                  <p:nvPr/>
+                </p:nvPicPr>
+                <p:blipFill>
+                  <a:blip r:embed="rId3">
+                    <a:extLst>
+                      <a:ext uri="{28A0092B-C50C-407E-A947-70E740481C1C}">
+                        <a14:useLocalDpi xmlns:a14="http://schemas.microsoft.com/office/drawing/2010/main" val="0"/>
+                      </a:ext>
+                    </a:extLst>
+                  </a:blip>
+                  <a:stretch>
+                    <a:fillRect/>
+                  </a:stretch>
+                </p:blipFill>
+                <p:spPr>
+                  <a:xfrm>
+                    <a:off x="4757963" y="5390296"/>
+                    <a:ext cx="544265" cy="1088530"/>
+                  </a:xfrm>
+                  <a:prstGeom prst="rect">
+                    <a:avLst/>
+                  </a:prstGeom>
+                </p:spPr>
+              </p:pic>
+              <p:cxnSp>
+                <p:nvCxnSpPr>
+                  <p:cNvPr id="34" name="直線コネクタ 33">
+                    <a:extLst>
+                      <a:ext uri="{FF2B5EF4-FFF2-40B4-BE49-F238E27FC236}">
+                        <a16:creationId xmlns:a16="http://schemas.microsoft.com/office/drawing/2014/main" id="{C0621920-7045-4A83-A2AE-2ADC03DF957D}"/>
+                      </a:ext>
+                    </a:extLst>
+                  </p:cNvPr>
+                  <p:cNvCxnSpPr>
+                    <a:cxnSpLocks/>
+                  </p:cNvCxnSpPr>
+                  <p:nvPr/>
+                </p:nvCxnSpPr>
+                <p:spPr>
+                  <a:xfrm>
+                    <a:off x="2594402" y="3002587"/>
+                    <a:ext cx="0" cy="3310467"/>
+                  </a:xfrm>
+                  <a:prstGeom prst="line">
+                    <a:avLst/>
+                  </a:prstGeom>
+                  <a:ln w="12700">
+                    <a:solidFill>
+                      <a:schemeClr val="tx1"/>
+                    </a:solidFill>
+                    <a:prstDash val="dash"/>
+                  </a:ln>
+                </p:spPr>
+                <p:style>
+                  <a:lnRef idx="1">
+                    <a:schemeClr val="accent1"/>
+                  </a:lnRef>
+                  <a:fillRef idx="0">
+                    <a:schemeClr val="accent1"/>
+                  </a:fillRef>
+                  <a:effectRef idx="0">
+                    <a:schemeClr val="accent1"/>
+                  </a:effectRef>
+                  <a:fontRef idx="minor">
+                    <a:schemeClr val="tx1"/>
+                  </a:fontRef>
+                </p:style>
+              </p:cxnSp>
+              <p:sp>
+                <p:nvSpPr>
+                  <p:cNvPr id="35" name="テキスト ボックス 34">
+                    <a:extLst>
+                      <a:ext uri="{FF2B5EF4-FFF2-40B4-BE49-F238E27FC236}">
+                        <a16:creationId xmlns:a16="http://schemas.microsoft.com/office/drawing/2014/main" id="{1EC7FCF9-2783-4C2E-A464-CE7CF46AB26C}"/>
+                      </a:ext>
+                    </a:extLst>
+                  </p:cNvPr>
+                  <p:cNvSpPr txBox="1"/>
+                  <p:nvPr/>
+                </p:nvSpPr>
+                <p:spPr>
+                  <a:xfrm>
+                    <a:off x="5502644" y="4219275"/>
+                    <a:ext cx="492443" cy="461665"/>
+                  </a:xfrm>
+                  <a:prstGeom prst="rect">
+                    <a:avLst/>
+                  </a:prstGeom>
+                  <a:noFill/>
+                </p:spPr>
+                <p:txBody>
+                  <a:bodyPr wrap="none" rtlCol="0">
+                    <a:spAutoFit/>
+                  </a:bodyPr>
+                  <a:lstStyle/>
+                  <a:p>
+                    <a:r>
+                      <a:rPr kumimoji="1" lang="ja-JP" altLang="en-US" sz="2400" b="1" dirty="0">
+                        <a:solidFill>
+                          <a:srgbClr val="FF0000"/>
+                        </a:solidFill>
+                      </a:rPr>
+                      <a:t>前</a:t>
+                    </a:r>
+                    <a:endParaRPr kumimoji="1" lang="en-US" altLang="ja-JP" sz="2400" b="1" dirty="0">
+                      <a:solidFill>
+                        <a:srgbClr val="FF0000"/>
+                      </a:solidFill>
+                    </a:endParaRPr>
+                  </a:p>
+                </p:txBody>
+              </p:sp>
+              <p:sp>
+                <p:nvSpPr>
+                  <p:cNvPr id="36" name="テキスト ボックス 35">
+                    <a:extLst>
+                      <a:ext uri="{FF2B5EF4-FFF2-40B4-BE49-F238E27FC236}">
+                        <a16:creationId xmlns:a16="http://schemas.microsoft.com/office/drawing/2014/main" id="{061643CD-A8AE-40D1-8CB6-E83C7E330DBE}"/>
+                      </a:ext>
+                    </a:extLst>
+                  </p:cNvPr>
+                  <p:cNvSpPr txBox="1"/>
+                  <p:nvPr/>
+                </p:nvSpPr>
+                <p:spPr>
+                  <a:xfrm>
+                    <a:off x="-567955" y="4219274"/>
+                    <a:ext cx="800219" cy="461665"/>
+                  </a:xfrm>
+                  <a:prstGeom prst="rect">
+                    <a:avLst/>
+                  </a:prstGeom>
+                  <a:noFill/>
+                </p:spPr>
+                <p:txBody>
+                  <a:bodyPr wrap="none" rtlCol="0">
+                    <a:spAutoFit/>
+                  </a:bodyPr>
+                  <a:lstStyle/>
+                  <a:p>
+                    <a:r>
+                      <a:rPr lang="ja-JP" altLang="en-US" sz="2400" b="1" dirty="0">
+                        <a:solidFill>
+                          <a:srgbClr val="FF0000"/>
+                        </a:solidFill>
+                      </a:rPr>
+                      <a:t>後ろ</a:t>
+                    </a:r>
+                    <a:endParaRPr kumimoji="1" lang="en-US" altLang="ja-JP" sz="2400" b="1" dirty="0">
+                      <a:solidFill>
+                        <a:srgbClr val="FF0000"/>
+                      </a:solidFill>
+                    </a:endParaRPr>
+                  </a:p>
+                </p:txBody>
+              </p:sp>
+            </p:grpSp>
+            <p:cxnSp>
+              <p:nvCxnSpPr>
+                <p:cNvPr id="31" name="直線矢印コネクタ 30">
+                  <a:extLst>
+                    <a:ext uri="{FF2B5EF4-FFF2-40B4-BE49-F238E27FC236}">
+                      <a16:creationId xmlns:a16="http://schemas.microsoft.com/office/drawing/2014/main" id="{B46701E1-8B78-43EF-A5C0-57F850EC2DCB}"/>
+                    </a:ext>
+                  </a:extLst>
+                </p:cNvPr>
+                <p:cNvCxnSpPr/>
+                <p:nvPr/>
+              </p:nvCxnSpPr>
+              <p:spPr>
+                <a:xfrm>
+                  <a:off x="3733800" y="3615267"/>
+                  <a:ext cx="2175933" cy="990600"/>
+                </a:xfrm>
+                <a:prstGeom prst="straightConnector1">
+                  <a:avLst/>
+                </a:prstGeom>
+                <a:ln w="38100">
+                  <a:solidFill>
+                    <a:srgbClr val="FF0000"/>
+                  </a:solidFill>
+                  <a:tailEnd type="triangle"/>
+                </a:ln>
+              </p:spPr>
+              <p:style>
+                <a:lnRef idx="1">
+                  <a:schemeClr val="accent1"/>
+                </a:lnRef>
+                <a:fillRef idx="0">
+                  <a:schemeClr val="accent1"/>
+                </a:fillRef>
+                <a:effectRef idx="0">
+                  <a:schemeClr val="accent1"/>
+                </a:effectRef>
+                <a:fontRef idx="minor">
+                  <a:schemeClr val="tx1"/>
+                </a:fontRef>
+              </p:style>
+            </p:cxnSp>
+          </p:grpSp>
+          <p:cxnSp>
+            <p:nvCxnSpPr>
+              <p:cNvPr id="29" name="直線矢印コネクタ 28">
+                <a:extLst>
+                  <a:ext uri="{FF2B5EF4-FFF2-40B4-BE49-F238E27FC236}">
+                    <a16:creationId xmlns:a16="http://schemas.microsoft.com/office/drawing/2014/main" id="{9D854CB5-4679-434F-89F6-22268E522335}"/>
+                  </a:ext>
+                </a:extLst>
+              </p:cNvPr>
+              <p:cNvCxnSpPr>
+                <a:cxnSpLocks/>
+              </p:cNvCxnSpPr>
+              <p:nvPr/>
+            </p:nvCxnSpPr>
+            <p:spPr>
+              <a:xfrm>
+                <a:off x="3733800" y="3609660"/>
+                <a:ext cx="553211" cy="5607"/>
+              </a:xfrm>
+              <a:prstGeom prst="straightConnector1">
+                <a:avLst/>
+              </a:prstGeom>
+              <a:ln w="38100">
+                <a:solidFill>
+                  <a:srgbClr val="00B050"/>
+                </a:solidFill>
+                <a:tailEnd type="triangle"/>
+              </a:ln>
+            </p:spPr>
+            <p:style>
+              <a:lnRef idx="1">
+                <a:schemeClr val="accent1"/>
+              </a:lnRef>
+              <a:fillRef idx="0">
+                <a:schemeClr val="accent1"/>
+              </a:fillRef>
+              <a:effectRef idx="0">
+                <a:schemeClr val="accent1"/>
+              </a:effectRef>
+              <a:fontRef idx="minor">
+                <a:schemeClr val="tx1"/>
+              </a:fontRef>
+            </p:style>
+          </p:cxnSp>
+        </p:grpSp>
+        <p:cxnSp>
+          <p:nvCxnSpPr>
+            <p:cNvPr id="27" name="直線コネクタ 26">
+              <a:extLst>
+                <a:ext uri="{FF2B5EF4-FFF2-40B4-BE49-F238E27FC236}">
+                  <a16:creationId xmlns:a16="http://schemas.microsoft.com/office/drawing/2014/main" id="{7CEBF13B-73E3-4685-AB7E-52603D052F19}"/>
+                </a:ext>
+              </a:extLst>
+            </p:cNvPr>
+            <p:cNvCxnSpPr/>
+            <p:nvPr/>
+          </p:nvCxnSpPr>
+          <p:spPr>
+            <a:xfrm>
+              <a:off x="5893460" y="2548467"/>
+              <a:ext cx="0" cy="2379133"/>
+            </a:xfrm>
+            <a:prstGeom prst="line">
+              <a:avLst/>
+            </a:prstGeom>
+            <a:ln w="38100">
+              <a:solidFill>
+                <a:schemeClr val="tx1"/>
+              </a:solidFill>
+              <a:prstDash val="dash"/>
+            </a:ln>
+          </p:spPr>
+          <p:style>
+            <a:lnRef idx="1">
+              <a:schemeClr val="accent1"/>
+            </a:lnRef>
+            <a:fillRef idx="0">
+              <a:schemeClr val="accent1"/>
+            </a:fillRef>
+            <a:effectRef idx="0">
+              <a:schemeClr val="accent1"/>
+            </a:effectRef>
+            <a:fontRef idx="minor">
+              <a:schemeClr val="tx1"/>
+            </a:fontRef>
+          </p:style>
+        </p:cxnSp>
+      </p:grpSp>
+    </p:spTree>
+    <p:extLst>
+      <p:ext uri="{BB962C8B-B14F-4D97-AF65-F5344CB8AC3E}">
+        <p14:creationId xmlns:p14="http://schemas.microsoft.com/office/powerpoint/2010/main" val="2365567103"/>
+      </p:ext>
+    </p:extLst>
+  </p:cSld>
+  <p:clrMapOvr>
+    <a:masterClrMapping/>
+  </p:clrMapOvr>
+</p:sld>
+</file>
+
+<file path=ppt/slides/slide6.xml><?xml version="1.0" encoding="utf-8"?>
+<p:sld xmlns:a="http://schemas.openxmlformats.org/drawingml/2006/main" xmlns:r="http://schemas.openxmlformats.org/officeDocument/2006/relationships" xmlns:p="http://schemas.openxmlformats.org/presentationml/2006/main">
+  <p:cSld>
+    <p:spTree>
+      <p:nvGrpSpPr>
+        <p:cNvPr id="1" name=""/>
+        <p:cNvGrpSpPr/>
+        <p:nvPr/>
+      </p:nvGrpSpPr>
+      <p:grpSpPr>
+        <a:xfrm>
+          <a:off x="0" y="0"/>
+          <a:ext cx="0" cy="0"/>
+          <a:chOff x="0" y="0"/>
+          <a:chExt cx="0" cy="0"/>
+        </a:xfrm>
+      </p:grpSpPr>
+      <p:sp>
+        <p:nvSpPr>
+          <p:cNvPr id="24" name="四角形: 角を丸くする 23">
+            <a:extLst>
+              <a:ext uri="{FF2B5EF4-FFF2-40B4-BE49-F238E27FC236}">
+                <a16:creationId xmlns:a16="http://schemas.microsoft.com/office/drawing/2014/main" id="{70DA1D8A-398E-48E7-92D4-82DD34A8BF60}"/>
+              </a:ext>
+            </a:extLst>
+          </p:cNvPr>
+          <p:cNvSpPr/>
+          <p:nvPr/>
+        </p:nvSpPr>
+        <p:spPr>
+          <a:xfrm>
+            <a:off x="6999515" y="4896625"/>
+            <a:ext cx="5014680" cy="1605712"/>
+          </a:xfrm>
+          <a:prstGeom prst="roundRect">
+            <a:avLst/>
+          </a:prstGeom>
+          <a:solidFill>
+            <a:schemeClr val="bg2"/>
+          </a:solidFill>
+          <a:ln>
+            <a:noFill/>
+          </a:ln>
+        </p:spPr>
+        <p:style>
+          <a:lnRef idx="2">
+            <a:schemeClr val="accent1">
+              <a:shade val="50000"/>
+            </a:schemeClr>
+          </a:lnRef>
+          <a:fillRef idx="1">
+            <a:schemeClr val="accent1"/>
+          </a:fillRef>
+          <a:effectRef idx="0">
+            <a:schemeClr val="accent1"/>
+          </a:effectRef>
+          <a:fontRef idx="minor">
+            <a:schemeClr val="lt1"/>
+          </a:fontRef>
+        </p:style>
+        <p:txBody>
+          <a:bodyPr rtlCol="0" anchor="ctr"/>
+          <a:lstStyle/>
+          <a:p>
+            <a:pPr algn="ctr"/>
+            <a:endParaRPr kumimoji="1" lang="ja-JP" altLang="en-US"/>
+          </a:p>
+        </p:txBody>
+      </p:sp>
+      <p:sp>
+        <p:nvSpPr>
+          <p:cNvPr id="4" name="テキスト ボックス 3">
+            <a:extLst>
+              <a:ext uri="{FF2B5EF4-FFF2-40B4-BE49-F238E27FC236}">
+                <a16:creationId xmlns:a16="http://schemas.microsoft.com/office/drawing/2014/main" id="{5A13BF46-B8C5-48AA-8308-C9ECFF431A18}"/>
+              </a:ext>
+            </a:extLst>
+          </p:cNvPr>
+          <p:cNvSpPr txBox="1"/>
+          <p:nvPr/>
+        </p:nvSpPr>
+        <p:spPr>
+          <a:xfrm>
+            <a:off x="567542" y="491954"/>
+            <a:ext cx="5929828" cy="584775"/>
+          </a:xfrm>
+          <a:prstGeom prst="rect">
+            <a:avLst/>
+          </a:prstGeom>
+          <a:noFill/>
+        </p:spPr>
+        <p:txBody>
+          <a:bodyPr wrap="none" rtlCol="0">
+            <a:spAutoFit/>
+          </a:bodyPr>
+          <a:lstStyle/>
+          <a:p>
+            <a:r>
+              <a:rPr kumimoji="1" lang="ja-JP" altLang="en-US" sz="3200" b="1" u="sng" dirty="0"/>
+              <a:t>ベクトルの内積による前後判定</a:t>
+            </a:r>
+          </a:p>
+        </p:txBody>
+      </p:sp>
+      <p:sp>
+        <p:nvSpPr>
+          <p:cNvPr id="6" name="テキスト ボックス 5">
+            <a:extLst>
+              <a:ext uri="{FF2B5EF4-FFF2-40B4-BE49-F238E27FC236}">
+                <a16:creationId xmlns:a16="http://schemas.microsoft.com/office/drawing/2014/main" id="{55830AD6-028B-4C4E-80BF-B70DFC1C3A46}"/>
+              </a:ext>
+            </a:extLst>
+          </p:cNvPr>
+          <p:cNvSpPr txBox="1"/>
+          <p:nvPr/>
+        </p:nvSpPr>
+        <p:spPr>
+          <a:xfrm>
+            <a:off x="567542" y="1216429"/>
+            <a:ext cx="7571303" cy="461665"/>
+          </a:xfrm>
+          <a:prstGeom prst="rect">
+            <a:avLst/>
+          </a:prstGeom>
+          <a:noFill/>
+        </p:spPr>
+        <p:txBody>
+          <a:bodyPr wrap="none" rtlCol="0">
+            <a:spAutoFit/>
+          </a:bodyPr>
+          <a:lstStyle/>
+          <a:p>
+            <a:r>
+              <a:rPr kumimoji="1" lang="ja-JP" altLang="en-US" sz="2400" b="1" dirty="0">
+                <a:solidFill>
+                  <a:srgbClr val="FF0000"/>
+                </a:solidFill>
+              </a:rPr>
+              <a:t>投影が左に伸びていれば後ろにいる</a:t>
+            </a:r>
+            <a:r>
+              <a:rPr kumimoji="1" lang="ja-JP" altLang="en-US" sz="2400" dirty="0"/>
+              <a:t>と判定できます。</a:t>
+            </a:r>
+            <a:endParaRPr kumimoji="1" lang="en-US" altLang="ja-JP" sz="2400" dirty="0"/>
+          </a:p>
+        </p:txBody>
+      </p:sp>
+      <p:sp>
+        <p:nvSpPr>
+          <p:cNvPr id="23" name="テキスト ボックス 22">
+            <a:extLst>
+              <a:ext uri="{FF2B5EF4-FFF2-40B4-BE49-F238E27FC236}">
+                <a16:creationId xmlns:a16="http://schemas.microsoft.com/office/drawing/2014/main" id="{6773D919-53D3-4B75-839C-EE5520084D4B}"/>
+              </a:ext>
+            </a:extLst>
+          </p:cNvPr>
+          <p:cNvSpPr txBox="1"/>
+          <p:nvPr/>
+        </p:nvSpPr>
+        <p:spPr>
+          <a:xfrm>
+            <a:off x="7094288" y="4932677"/>
+            <a:ext cx="5109091" cy="1569660"/>
+          </a:xfrm>
+          <a:prstGeom prst="rect">
+            <a:avLst/>
+          </a:prstGeom>
+          <a:noFill/>
+        </p:spPr>
+        <p:txBody>
+          <a:bodyPr wrap="none" rtlCol="0">
+            <a:spAutoFit/>
+          </a:bodyPr>
+          <a:lstStyle/>
+          <a:p>
+            <a:r>
+              <a:rPr kumimoji="1" lang="en-US" altLang="ja-JP" sz="2400" b="1" dirty="0">
+                <a:solidFill>
+                  <a:srgbClr val="00B050"/>
+                </a:solidFill>
+              </a:rPr>
+              <a:t>MEMO</a:t>
+            </a:r>
+          </a:p>
+          <a:p>
+            <a:r>
+              <a:rPr kumimoji="1" lang="ja-JP" altLang="en-US" sz="2400" dirty="0"/>
+              <a:t>スクリーン座標系は</a:t>
+            </a:r>
+            <a:r>
+              <a:rPr kumimoji="1" lang="ja-JP" altLang="en-US" sz="2400" b="1" dirty="0">
+                <a:solidFill>
+                  <a:srgbClr val="FF0000"/>
+                </a:solidFill>
+              </a:rPr>
+              <a:t>左に負</a:t>
+            </a:r>
+            <a:r>
+              <a:rPr kumimoji="1" lang="ja-JP" altLang="en-US" sz="2400" dirty="0"/>
+              <a:t>なので、</a:t>
+            </a:r>
+            <a:endParaRPr kumimoji="1" lang="en-US" altLang="ja-JP" sz="2400" dirty="0"/>
+          </a:p>
+          <a:p>
+            <a:r>
+              <a:rPr lang="ja-JP" altLang="en-US" sz="2400" b="1" dirty="0">
+                <a:solidFill>
+                  <a:srgbClr val="FF0000"/>
+                </a:solidFill>
+              </a:rPr>
+              <a:t>投影が左に伸びるということは、</a:t>
+            </a:r>
+            <a:endParaRPr lang="en-US" altLang="ja-JP" sz="2400" b="1" dirty="0">
+              <a:solidFill>
+                <a:srgbClr val="FF0000"/>
+              </a:solidFill>
+            </a:endParaRPr>
+          </a:p>
+          <a:p>
+            <a:r>
+              <a:rPr kumimoji="1" lang="ja-JP" altLang="en-US" sz="2400" b="1" dirty="0">
+                <a:solidFill>
+                  <a:srgbClr val="FF0000"/>
+                </a:solidFill>
+              </a:rPr>
+              <a:t>内積の計算結果が負</a:t>
+            </a:r>
+            <a:r>
+              <a:rPr kumimoji="1" lang="ja-JP" altLang="en-US" sz="2400" dirty="0"/>
+              <a:t>ということ。</a:t>
+            </a:r>
+            <a:endParaRPr kumimoji="1" lang="en-US" altLang="ja-JP" sz="2400" dirty="0"/>
+          </a:p>
+        </p:txBody>
+      </p:sp>
+      <p:grpSp>
+        <p:nvGrpSpPr>
+          <p:cNvPr id="25" name="グループ化 24">
+            <a:extLst>
+              <a:ext uri="{FF2B5EF4-FFF2-40B4-BE49-F238E27FC236}">
+                <a16:creationId xmlns:a16="http://schemas.microsoft.com/office/drawing/2014/main" id="{B1893FB6-364F-449D-9D66-BA23C7BF1554}"/>
+              </a:ext>
+            </a:extLst>
+          </p:cNvPr>
+          <p:cNvGrpSpPr/>
+          <p:nvPr/>
+        </p:nvGrpSpPr>
+        <p:grpSpPr>
+          <a:xfrm>
+            <a:off x="567542" y="2084615"/>
+            <a:ext cx="6563042" cy="3412978"/>
+            <a:chOff x="567542" y="2084615"/>
+            <a:chExt cx="6563042" cy="3412978"/>
+          </a:xfrm>
+        </p:grpSpPr>
+        <p:grpSp>
+          <p:nvGrpSpPr>
+            <p:cNvPr id="27" name="グループ化 26">
+              <a:extLst>
+                <a:ext uri="{FF2B5EF4-FFF2-40B4-BE49-F238E27FC236}">
+                  <a16:creationId xmlns:a16="http://schemas.microsoft.com/office/drawing/2014/main" id="{2C9C8DEA-C30C-462D-B0F5-0CDF78393641}"/>
+                </a:ext>
+              </a:extLst>
+            </p:cNvPr>
+            <p:cNvGrpSpPr/>
+            <p:nvPr/>
+          </p:nvGrpSpPr>
+          <p:grpSpPr>
+            <a:xfrm>
+              <a:off x="567542" y="2187126"/>
+              <a:ext cx="6563042" cy="3310467"/>
+              <a:chOff x="567542" y="2187126"/>
+              <a:chExt cx="6563042" cy="3310467"/>
+            </a:xfrm>
+          </p:grpSpPr>
+          <p:grpSp>
+            <p:nvGrpSpPr>
+              <p:cNvPr id="29" name="グループ化 28">
+                <a:extLst>
+                  <a:ext uri="{FF2B5EF4-FFF2-40B4-BE49-F238E27FC236}">
+                    <a16:creationId xmlns:a16="http://schemas.microsoft.com/office/drawing/2014/main" id="{6385274A-5BF5-44ED-8EBC-2470B84E3B49}"/>
+                  </a:ext>
+                </a:extLst>
+              </p:cNvPr>
+              <p:cNvGrpSpPr/>
+              <p:nvPr/>
+            </p:nvGrpSpPr>
+            <p:grpSpPr>
+              <a:xfrm>
+                <a:off x="567542" y="2187126"/>
+                <a:ext cx="6563042" cy="3310467"/>
+                <a:chOff x="567542" y="2187126"/>
+                <a:chExt cx="6563042" cy="3310467"/>
+              </a:xfrm>
+            </p:grpSpPr>
+            <p:grpSp>
+              <p:nvGrpSpPr>
+                <p:cNvPr id="31" name="グループ化 30">
+                  <a:extLst>
+                    <a:ext uri="{FF2B5EF4-FFF2-40B4-BE49-F238E27FC236}">
+                      <a16:creationId xmlns:a16="http://schemas.microsoft.com/office/drawing/2014/main" id="{E763F212-DBF2-4C36-A6D1-7E94D2E2B7C2}"/>
+                    </a:ext>
+                  </a:extLst>
+                </p:cNvPr>
+                <p:cNvGrpSpPr/>
+                <p:nvPr/>
+              </p:nvGrpSpPr>
+              <p:grpSpPr>
+                <a:xfrm>
+                  <a:off x="567542" y="2187126"/>
+                  <a:ext cx="6563042" cy="3310467"/>
+                  <a:chOff x="-567955" y="3002587"/>
+                  <a:chExt cx="6563042" cy="3310467"/>
+                </a:xfrm>
+              </p:grpSpPr>
+              <p:pic>
+                <p:nvPicPr>
+                  <p:cNvPr id="33" name="図 32">
+                    <a:extLst>
+                      <a:ext uri="{FF2B5EF4-FFF2-40B4-BE49-F238E27FC236}">
+                        <a16:creationId xmlns:a16="http://schemas.microsoft.com/office/drawing/2014/main" id="{0906CA16-B505-4D83-8327-46B9CB34F823}"/>
+                      </a:ext>
+                    </a:extLst>
+                  </p:cNvPr>
+                  <p:cNvPicPr>
+                    <a:picLocks noChangeAspect="1"/>
+                  </p:cNvPicPr>
+                  <p:nvPr/>
+                </p:nvPicPr>
+                <p:blipFill>
+                  <a:blip r:embed="rId2">
+                    <a:extLst>
+                      <a:ext uri="{28A0092B-C50C-407E-A947-70E740481C1C}">
+                        <a14:useLocalDpi xmlns:a14="http://schemas.microsoft.com/office/drawing/2010/main" val="0"/>
+                      </a:ext>
+                    </a:extLst>
+                  </a:blip>
+                  <a:stretch>
+                    <a:fillRect/>
+                  </a:stretch>
+                </p:blipFill>
+                <p:spPr>
+                  <a:xfrm>
+                    <a:off x="2233937" y="4089643"/>
+                    <a:ext cx="720931" cy="720931"/>
+                  </a:xfrm>
+                  <a:prstGeom prst="rect">
+                    <a:avLst/>
+                  </a:prstGeom>
+                </p:spPr>
+              </p:pic>
+              <p:pic>
+                <p:nvPicPr>
+                  <p:cNvPr id="34" name="図 33">
+                    <a:extLst>
+                      <a:ext uri="{FF2B5EF4-FFF2-40B4-BE49-F238E27FC236}">
+                        <a16:creationId xmlns:a16="http://schemas.microsoft.com/office/drawing/2014/main" id="{340326F2-33EF-439E-B8D4-51C36AE4652F}"/>
+                      </a:ext>
+                    </a:extLst>
+                  </p:cNvPr>
+                  <p:cNvPicPr>
+                    <a:picLocks noChangeAspect="1"/>
+                  </p:cNvPicPr>
+                  <p:nvPr/>
+                </p:nvPicPr>
+                <p:blipFill>
+                  <a:blip r:embed="rId3">
+                    <a:extLst>
+                      <a:ext uri="{28A0092B-C50C-407E-A947-70E740481C1C}">
+                        <a14:useLocalDpi xmlns:a14="http://schemas.microsoft.com/office/drawing/2010/main" val="0"/>
+                      </a:ext>
+                    </a:extLst>
+                  </a:blip>
+                  <a:stretch>
+                    <a:fillRect/>
+                  </a:stretch>
+                </p:blipFill>
+                <p:spPr>
+                  <a:xfrm>
+                    <a:off x="430842" y="5224524"/>
+                    <a:ext cx="544265" cy="1088530"/>
+                  </a:xfrm>
+                  <a:prstGeom prst="rect">
+                    <a:avLst/>
+                  </a:prstGeom>
+                </p:spPr>
+              </p:pic>
+              <p:cxnSp>
+                <p:nvCxnSpPr>
+                  <p:cNvPr id="35" name="直線コネクタ 34">
+                    <a:extLst>
+                      <a:ext uri="{FF2B5EF4-FFF2-40B4-BE49-F238E27FC236}">
+                        <a16:creationId xmlns:a16="http://schemas.microsoft.com/office/drawing/2014/main" id="{673B3483-D27E-44F3-AC90-003FDD364B43}"/>
+                      </a:ext>
+                    </a:extLst>
+                  </p:cNvPr>
+                  <p:cNvCxnSpPr>
+                    <a:cxnSpLocks/>
+                  </p:cNvCxnSpPr>
+                  <p:nvPr/>
+                </p:nvCxnSpPr>
+                <p:spPr>
+                  <a:xfrm>
+                    <a:off x="2594402" y="3002587"/>
+                    <a:ext cx="0" cy="3310467"/>
+                  </a:xfrm>
+                  <a:prstGeom prst="line">
+                    <a:avLst/>
+                  </a:prstGeom>
+                  <a:ln w="12700">
+                    <a:solidFill>
+                      <a:schemeClr val="tx1"/>
+                    </a:solidFill>
+                    <a:prstDash val="dash"/>
+                  </a:ln>
+                </p:spPr>
+                <p:style>
+                  <a:lnRef idx="1">
+                    <a:schemeClr val="accent1"/>
+                  </a:lnRef>
+                  <a:fillRef idx="0">
+                    <a:schemeClr val="accent1"/>
+                  </a:fillRef>
+                  <a:effectRef idx="0">
+                    <a:schemeClr val="accent1"/>
+                  </a:effectRef>
+                  <a:fontRef idx="minor">
+                    <a:schemeClr val="tx1"/>
+                  </a:fontRef>
+                </p:style>
+              </p:cxnSp>
+              <p:sp>
+                <p:nvSpPr>
+                  <p:cNvPr id="36" name="テキスト ボックス 35">
+                    <a:extLst>
+                      <a:ext uri="{FF2B5EF4-FFF2-40B4-BE49-F238E27FC236}">
+                        <a16:creationId xmlns:a16="http://schemas.microsoft.com/office/drawing/2014/main" id="{63D326D3-B000-432B-87D1-BC1EBFFD19F6}"/>
+                      </a:ext>
+                    </a:extLst>
+                  </p:cNvPr>
+                  <p:cNvSpPr txBox="1"/>
+                  <p:nvPr/>
+                </p:nvSpPr>
+                <p:spPr>
+                  <a:xfrm>
+                    <a:off x="5502644" y="4219275"/>
+                    <a:ext cx="492443" cy="461665"/>
+                  </a:xfrm>
+                  <a:prstGeom prst="rect">
+                    <a:avLst/>
+                  </a:prstGeom>
+                  <a:noFill/>
+                </p:spPr>
+                <p:txBody>
+                  <a:bodyPr wrap="none" rtlCol="0">
+                    <a:spAutoFit/>
+                  </a:bodyPr>
+                  <a:lstStyle/>
+                  <a:p>
+                    <a:r>
+                      <a:rPr kumimoji="1" lang="ja-JP" altLang="en-US" sz="2400" b="1" dirty="0">
+                        <a:solidFill>
+                          <a:srgbClr val="FF0000"/>
+                        </a:solidFill>
+                      </a:rPr>
+                      <a:t>前</a:t>
+                    </a:r>
+                    <a:endParaRPr kumimoji="1" lang="en-US" altLang="ja-JP" sz="2400" b="1" dirty="0">
+                      <a:solidFill>
+                        <a:srgbClr val="FF0000"/>
+                      </a:solidFill>
+                    </a:endParaRPr>
+                  </a:p>
+                </p:txBody>
+              </p:sp>
+              <p:sp>
+                <p:nvSpPr>
+                  <p:cNvPr id="37" name="テキスト ボックス 36">
+                    <a:extLst>
+                      <a:ext uri="{FF2B5EF4-FFF2-40B4-BE49-F238E27FC236}">
+                        <a16:creationId xmlns:a16="http://schemas.microsoft.com/office/drawing/2014/main" id="{662F3386-20BB-4026-8E65-27D2E071479C}"/>
+                      </a:ext>
+                    </a:extLst>
+                  </p:cNvPr>
+                  <p:cNvSpPr txBox="1"/>
+                  <p:nvPr/>
+                </p:nvSpPr>
+                <p:spPr>
+                  <a:xfrm>
+                    <a:off x="-567955" y="4219274"/>
+                    <a:ext cx="800219" cy="461665"/>
+                  </a:xfrm>
+                  <a:prstGeom prst="rect">
+                    <a:avLst/>
+                  </a:prstGeom>
+                  <a:noFill/>
+                </p:spPr>
+                <p:txBody>
+                  <a:bodyPr wrap="none" rtlCol="0">
+                    <a:spAutoFit/>
+                  </a:bodyPr>
+                  <a:lstStyle/>
+                  <a:p>
+                    <a:r>
+                      <a:rPr lang="ja-JP" altLang="en-US" sz="2400" b="1" dirty="0">
+                        <a:solidFill>
+                          <a:srgbClr val="FF0000"/>
+                        </a:solidFill>
+                      </a:rPr>
+                      <a:t>後ろ</a:t>
+                    </a:r>
+                    <a:endParaRPr kumimoji="1" lang="en-US" altLang="ja-JP" sz="2400" b="1" dirty="0">
+                      <a:solidFill>
+                        <a:srgbClr val="FF0000"/>
+                      </a:solidFill>
+                    </a:endParaRPr>
+                  </a:p>
+                </p:txBody>
+              </p:sp>
+            </p:grpSp>
+            <p:cxnSp>
+              <p:nvCxnSpPr>
+                <p:cNvPr id="32" name="直線矢印コネクタ 31">
+                  <a:extLst>
+                    <a:ext uri="{FF2B5EF4-FFF2-40B4-BE49-F238E27FC236}">
+                      <a16:creationId xmlns:a16="http://schemas.microsoft.com/office/drawing/2014/main" id="{9709F834-62A5-4BCE-A2D4-FD04F12E3843}"/>
+                    </a:ext>
+                  </a:extLst>
+                </p:cNvPr>
+                <p:cNvCxnSpPr>
+                  <a:cxnSpLocks/>
+                  <a:endCxn id="34" idx="0"/>
+                </p:cNvCxnSpPr>
+                <p:nvPr/>
+              </p:nvCxnSpPr>
+              <p:spPr>
+                <a:xfrm flipH="1">
+                  <a:off x="1838472" y="3615267"/>
+                  <a:ext cx="1895328" cy="793796"/>
+                </a:xfrm>
+                <a:prstGeom prst="straightConnector1">
+                  <a:avLst/>
+                </a:prstGeom>
+                <a:ln w="38100">
+                  <a:solidFill>
+                    <a:srgbClr val="FF0000"/>
+                  </a:solidFill>
+                  <a:tailEnd type="triangle"/>
+                </a:ln>
+              </p:spPr>
+              <p:style>
+                <a:lnRef idx="1">
+                  <a:schemeClr val="accent1"/>
+                </a:lnRef>
+                <a:fillRef idx="0">
+                  <a:schemeClr val="accent1"/>
+                </a:fillRef>
+                <a:effectRef idx="0">
+                  <a:schemeClr val="accent1"/>
+                </a:effectRef>
+                <a:fontRef idx="minor">
+                  <a:schemeClr val="tx1"/>
+                </a:fontRef>
+              </p:style>
+            </p:cxnSp>
+          </p:grpSp>
+          <p:cxnSp>
+            <p:nvCxnSpPr>
+              <p:cNvPr id="30" name="直線矢印コネクタ 29">
+                <a:extLst>
+                  <a:ext uri="{FF2B5EF4-FFF2-40B4-BE49-F238E27FC236}">
+                    <a16:creationId xmlns:a16="http://schemas.microsoft.com/office/drawing/2014/main" id="{A137AB7B-74E5-43C2-AB35-61D7BD8BC3C0}"/>
+                  </a:ext>
+                </a:extLst>
+              </p:cNvPr>
+              <p:cNvCxnSpPr>
+                <a:cxnSpLocks/>
+              </p:cNvCxnSpPr>
+              <p:nvPr/>
+            </p:nvCxnSpPr>
+            <p:spPr>
+              <a:xfrm>
+                <a:off x="3733800" y="3609660"/>
+                <a:ext cx="553211" cy="5607"/>
+              </a:xfrm>
+              <a:prstGeom prst="straightConnector1">
+                <a:avLst/>
+              </a:prstGeom>
+              <a:ln w="38100">
+                <a:solidFill>
+                  <a:srgbClr val="00B050"/>
+                </a:solidFill>
+                <a:tailEnd type="triangle"/>
+              </a:ln>
+            </p:spPr>
+            <p:style>
+              <a:lnRef idx="1">
+                <a:schemeClr val="accent1"/>
+              </a:lnRef>
+              <a:fillRef idx="0">
+                <a:schemeClr val="accent1"/>
+              </a:fillRef>
+              <a:effectRef idx="0">
+                <a:schemeClr val="accent1"/>
+              </a:effectRef>
+              <a:fontRef idx="minor">
+                <a:schemeClr val="tx1"/>
+              </a:fontRef>
+            </p:style>
+          </p:cxnSp>
+        </p:grpSp>
+        <p:cxnSp>
+          <p:nvCxnSpPr>
+            <p:cNvPr id="28" name="直線コネクタ 27">
+              <a:extLst>
+                <a:ext uri="{FF2B5EF4-FFF2-40B4-BE49-F238E27FC236}">
+                  <a16:creationId xmlns:a16="http://schemas.microsoft.com/office/drawing/2014/main" id="{94ACDFEF-A4D3-4F2A-9BE2-E74B84AD5655}"/>
+                </a:ext>
+              </a:extLst>
+            </p:cNvPr>
+            <p:cNvCxnSpPr/>
+            <p:nvPr/>
+          </p:nvCxnSpPr>
+          <p:spPr>
+            <a:xfrm>
+              <a:off x="1838471" y="2084615"/>
+              <a:ext cx="0" cy="2379133"/>
+            </a:xfrm>
+            <a:prstGeom prst="line">
+              <a:avLst/>
+            </a:prstGeom>
+            <a:ln w="38100">
+              <a:solidFill>
+                <a:schemeClr val="tx1"/>
+              </a:solidFill>
+              <a:prstDash val="dash"/>
+            </a:ln>
+          </p:spPr>
+          <p:style>
+            <a:lnRef idx="1">
+              <a:schemeClr val="accent1"/>
+            </a:lnRef>
+            <a:fillRef idx="0">
+              <a:schemeClr val="accent1"/>
+            </a:fillRef>
+            <a:effectRef idx="0">
+              <a:schemeClr val="accent1"/>
+            </a:effectRef>
+            <a:fontRef idx="minor">
+              <a:schemeClr val="tx1"/>
+            </a:fontRef>
+          </p:style>
+        </p:cxnSp>
+        <p:cxnSp>
+          <p:nvCxnSpPr>
+            <p:cNvPr id="26" name="直線矢印コネクタ 25">
+              <a:extLst>
+                <a:ext uri="{FF2B5EF4-FFF2-40B4-BE49-F238E27FC236}">
+                  <a16:creationId xmlns:a16="http://schemas.microsoft.com/office/drawing/2014/main" id="{F9DED2C3-33A2-432C-B5A5-04AB987E8A7C}"/>
+                </a:ext>
+              </a:extLst>
+            </p:cNvPr>
+            <p:cNvCxnSpPr>
+              <a:cxnSpLocks/>
+            </p:cNvCxnSpPr>
+            <p:nvPr/>
+          </p:nvCxnSpPr>
+          <p:spPr>
+            <a:xfrm flipH="1">
+              <a:off x="1838471" y="3609660"/>
+              <a:ext cx="1891428" cy="0"/>
+            </a:xfrm>
+            <a:prstGeom prst="straightConnector1">
+              <a:avLst/>
+            </a:prstGeom>
+            <a:ln w="38100">
+              <a:solidFill>
+                <a:schemeClr val="tx1"/>
+              </a:solidFill>
+              <a:tailEnd type="triangle"/>
+            </a:ln>
+          </p:spPr>
+          <p:style>
+            <a:lnRef idx="1">
+              <a:schemeClr val="accent1"/>
+            </a:lnRef>
+            <a:fillRef idx="0">
+              <a:schemeClr val="accent1"/>
+            </a:fillRef>
+            <a:effectRef idx="0">
+              <a:schemeClr val="accent1"/>
+            </a:effectRef>
+            <a:fontRef idx="minor">
+              <a:schemeClr val="tx1"/>
+            </a:fontRef>
+          </p:style>
+        </p:cxnSp>
+      </p:grpSp>
+    </p:spTree>
+    <p:extLst>
+      <p:ext uri="{BB962C8B-B14F-4D97-AF65-F5344CB8AC3E}">
+        <p14:creationId xmlns:p14="http://schemas.microsoft.com/office/powerpoint/2010/main" val="2003779986"/>
+      </p:ext>
+    </p:extLst>
+  </p:cSld>
+  <p:clrMapOvr>
+    <a:masterClrMapping/>
+  </p:clrMapOvr>
+</p:sld>
+</file>
+
+<file path=ppt/slides/slide7.xml><?xml version="1.0" encoding="utf-8"?>
+<p:sld xmlns:a="http://schemas.openxmlformats.org/drawingml/2006/main" xmlns:r="http://schemas.openxmlformats.org/officeDocument/2006/relationships" xmlns:p="http://schemas.openxmlformats.org/presentationml/2006/main">
+  <p:cSld>
+    <p:spTree>
+      <p:nvGrpSpPr>
+        <p:cNvPr id="1" name=""/>
+        <p:cNvGrpSpPr/>
+        <p:nvPr/>
+      </p:nvGrpSpPr>
+      <p:grpSpPr>
+        <a:xfrm>
+          <a:off x="0" y="0"/>
+          <a:ext cx="0" cy="0"/>
+          <a:chOff x="0" y="0"/>
+          <a:chExt cx="0" cy="0"/>
+        </a:xfrm>
+      </p:grpSpPr>
+      <p:sp>
+        <p:nvSpPr>
+          <p:cNvPr id="4" name="テキスト ボックス 3">
+            <a:extLst>
+              <a:ext uri="{FF2B5EF4-FFF2-40B4-BE49-F238E27FC236}">
+                <a16:creationId xmlns:a16="http://schemas.microsoft.com/office/drawing/2014/main" id="{5A13BF46-B8C5-48AA-8308-C9ECFF431A18}"/>
+              </a:ext>
+            </a:extLst>
+          </p:cNvPr>
+          <p:cNvSpPr txBox="1"/>
+          <p:nvPr/>
+        </p:nvSpPr>
+        <p:spPr>
+          <a:xfrm>
+            <a:off x="567542" y="491954"/>
+            <a:ext cx="5929828" cy="584775"/>
+          </a:xfrm>
+          <a:prstGeom prst="rect">
+            <a:avLst/>
+          </a:prstGeom>
+          <a:noFill/>
+        </p:spPr>
+        <p:txBody>
+          <a:bodyPr wrap="none" rtlCol="0">
+            <a:spAutoFit/>
+          </a:bodyPr>
+          <a:lstStyle/>
+          <a:p>
+            <a:r>
+              <a:rPr kumimoji="1" lang="ja-JP" altLang="en-US" sz="3200" b="1" u="sng" dirty="0"/>
+              <a:t>ベクトルの内積による前後判定</a:t>
+            </a:r>
+          </a:p>
+        </p:txBody>
+      </p:sp>
+      <p:sp>
+        <p:nvSpPr>
+          <p:cNvPr id="6" name="テキスト ボックス 5">
+            <a:extLst>
+              <a:ext uri="{FF2B5EF4-FFF2-40B4-BE49-F238E27FC236}">
+                <a16:creationId xmlns:a16="http://schemas.microsoft.com/office/drawing/2014/main" id="{55830AD6-028B-4C4E-80BF-B70DFC1C3A46}"/>
+              </a:ext>
+            </a:extLst>
+          </p:cNvPr>
+          <p:cNvSpPr txBox="1"/>
+          <p:nvPr/>
+        </p:nvSpPr>
+        <p:spPr>
+          <a:xfrm>
+            <a:off x="567542" y="1216429"/>
+            <a:ext cx="6277681" cy="461665"/>
+          </a:xfrm>
+          <a:prstGeom prst="rect">
+            <a:avLst/>
+          </a:prstGeom>
+          <a:noFill/>
+        </p:spPr>
+        <p:txBody>
+          <a:bodyPr wrap="none" rtlCol="0">
+            <a:spAutoFit/>
+          </a:bodyPr>
+          <a:lstStyle/>
+          <a:p>
+            <a:r>
+              <a:rPr lang="en-US" altLang="ja-JP" sz="2400" b="1" dirty="0">
+                <a:solidFill>
+                  <a:srgbClr val="FF0000"/>
+                </a:solidFill>
+              </a:rPr>
+              <a:t>SightMachine.cpp</a:t>
+            </a:r>
+            <a:r>
+              <a:rPr lang="ja-JP" altLang="en-US" sz="2400" dirty="0"/>
+              <a:t>の空白を埋めましょう。</a:t>
+            </a:r>
+            <a:endParaRPr kumimoji="1" lang="en-US" altLang="ja-JP" sz="2400" dirty="0"/>
+          </a:p>
+        </p:txBody>
+      </p:sp>
+      <p:pic>
+        <p:nvPicPr>
+          <p:cNvPr id="3" name="図 2">
+            <a:extLst>
+              <a:ext uri="{FF2B5EF4-FFF2-40B4-BE49-F238E27FC236}">
+                <a16:creationId xmlns:a16="http://schemas.microsoft.com/office/drawing/2014/main" id="{1B46509C-84B6-43D7-B077-17D47FA21113}"/>
+              </a:ext>
+            </a:extLst>
+          </p:cNvPr>
+          <p:cNvPicPr>
+            <a:picLocks noChangeAspect="1"/>
+          </p:cNvPicPr>
+          <p:nvPr/>
+        </p:nvPicPr>
+        <p:blipFill>
+          <a:blip r:embed="rId2"/>
+          <a:stretch>
+            <a:fillRect/>
+          </a:stretch>
+        </p:blipFill>
+        <p:spPr>
+          <a:xfrm>
+            <a:off x="567541" y="1817794"/>
+            <a:ext cx="9025809" cy="2364739"/>
+          </a:xfrm>
+          <a:prstGeom prst="rect">
+            <a:avLst/>
+          </a:prstGeom>
+        </p:spPr>
+      </p:pic>
+    </p:spTree>
+    <p:extLst>
+      <p:ext uri="{BB962C8B-B14F-4D97-AF65-F5344CB8AC3E}">
+        <p14:creationId xmlns:p14="http://schemas.microsoft.com/office/powerpoint/2010/main" val="4006473966"/>
       </p:ext>
     </p:extLst>
   </p:cSld>
